--- a/assets/figures-editable/c3-c4/c3-e09.pptx
+++ b/assets/figures-editable/c3-c4/c3-e09.pptx
@@ -3104,8 +3104,8 @@
         </p:nvSpPr>
         <p:spPr>
           <a:xfrm>
-            <a:off x="274320" y="137160"/>
-            <a:ext cx="11612880" cy="365760"/>
+            <a:off x="274320" y="118872"/>
+            <a:ext cx="11612880" cy="340105"/>
           </a:xfrm>
           <a:prstGeom prst="rect">
             <a:avLst/>
@@ -3114,7 +3114,7 @@
           <a:effectLst/>
         </p:spPr>
         <p:txBody>
-          <a:bodyPr wrap="square" lIns="27432" rIns="27432" tIns="18288" bIns="18288" anchor="ctr">
+          <a:bodyPr wrap="none" lIns="18288" rIns="18288" tIns="18288" bIns="18288" anchor="t">
             <a:spAutoFit/>
           </a:bodyPr>
           <a:lstStyle/>
@@ -3125,7 +3125,7 @@
               </a:spcAft>
             </a:pPr>
             <a:r>
-              <a:rPr sz="2100" b="0" i="0">
+              <a:rPr sz="1900" b="1" i="0">
                 <a:solidFill>
                   <a:srgbClr val="8EDBD4"/>
                 </a:solidFill>
@@ -3136,23 +3136,20 @@
           </a:p>
         </p:txBody>
       </p:sp>
-      <p:sp>
-        <p:nvSpPr>
-          <p:cNvPr id="3" name="C3-E09 ellipse 1" descr="sci-ppt:o001"/>
-          <p:cNvSpPr/>
+      <p:cxnSp>
+        <p:nvCxnSpPr>
+          <p:cNvPr id="3" name="C3-E09 line 1" descr="sci-ppt:o001"/>
+          <p:cNvCxnSpPr/>
           <p:nvPr/>
-        </p:nvSpPr>
-        <p:spPr>
-          <a:xfrm>
-            <a:off x="1417319" y="1280160"/>
-            <a:ext cx="1554480" cy="1554480"/>
-          </a:xfrm>
-          <a:prstGeom prst="ellipse">
+        </p:nvCxnSpPr>
+        <p:spPr>
+          <a:xfrm>
+            <a:off x="914400" y="5029200"/>
+            <a:ext cx="6035040" cy="0"/>
+          </a:xfrm>
+          <a:prstGeom prst="line">
             <a:avLst/>
           </a:prstGeom>
-          <a:solidFill>
-            <a:srgbClr val="213E4B"/>
-          </a:solidFill>
           <a:ln w="19050">
             <a:solidFill>
               <a:srgbClr val="B4C7D2"/>
@@ -3160,31 +3157,21 @@
           </a:ln>
           <a:effectLst/>
         </p:spPr>
-        <p:txBody>
-          <a:bodyPr rtlCol="0" anchor="ctr"/>
-          <a:lstStyle/>
-          <a:p>
-            <a:pPr algn="ctr"/>
-          </a:p>
-        </p:txBody>
-      </p:sp>
-      <p:sp>
-        <p:nvSpPr>
-          <p:cNvPr id="4" name="C3-E09 ellipse 2" descr="sci-ppt:o002"/>
-          <p:cNvSpPr/>
+      </p:cxnSp>
+      <p:cxnSp>
+        <p:nvCxnSpPr>
+          <p:cNvPr id="4" name="C3-E09 line 2" descr="sci-ppt:o002"/>
+          <p:cNvCxnSpPr/>
           <p:nvPr/>
-        </p:nvSpPr>
-        <p:spPr>
-          <a:xfrm>
-            <a:off x="7909560" y="1280160"/>
-            <a:ext cx="1554480" cy="1554480"/>
-          </a:xfrm>
-          <a:prstGeom prst="ellipse">
+        </p:nvCxnSpPr>
+        <p:spPr>
+          <a:xfrm>
+            <a:off x="914400" y="1371600"/>
+            <a:ext cx="0" cy="3657600"/>
+          </a:xfrm>
+          <a:prstGeom prst="line">
             <a:avLst/>
           </a:prstGeom>
-          <a:solidFill>
-            <a:srgbClr val="213E4B"/>
-          </a:solidFill>
           <a:ln w="19050">
             <a:solidFill>
               <a:srgbClr val="B4C7D2"/>
@@ -3192,24 +3179,61 @@
           </a:ln>
           <a:effectLst/>
         </p:spPr>
-        <p:txBody>
-          <a:bodyPr rtlCol="0" anchor="ctr"/>
-          <a:lstStyle/>
-          <a:p>
-            <a:pPr algn="ctr"/>
-          </a:p>
-        </p:txBody>
-      </p:sp>
-      <p:sp>
-        <p:nvSpPr>
-          <p:cNvPr id="5" name="C3-E09 text 3" descr="sci-ppt:o003"/>
+      </p:cxnSp>
+      <p:cxnSp>
+        <p:nvCxnSpPr>
+          <p:cNvPr id="5" name="C3-E09 line 3" descr="sci-ppt:o003"/>
+          <p:cNvCxnSpPr/>
+          <p:nvPr/>
+        </p:nvCxnSpPr>
+        <p:spPr>
+          <a:xfrm>
+            <a:off x="914400" y="5029200"/>
+            <a:ext cx="0" cy="64008"/>
+          </a:xfrm>
+          <a:prstGeom prst="line">
+            <a:avLst/>
+          </a:prstGeom>
+          <a:ln w="12700">
+            <a:solidFill>
+              <a:srgbClr val="B4C7D2"/>
+            </a:solidFill>
+          </a:ln>
+          <a:effectLst/>
+        </p:spPr>
+      </p:cxnSp>
+      <p:cxnSp>
+        <p:nvCxnSpPr>
+          <p:cNvPr id="6" name="C3-E09 line 4" descr="sci-ppt:o004"/>
+          <p:cNvCxnSpPr/>
+          <p:nvPr/>
+        </p:nvCxnSpPr>
+        <p:spPr>
+          <a:xfrm>
+            <a:off x="914400" y="1371600"/>
+            <a:ext cx="0" cy="3657600"/>
+          </a:xfrm>
+          <a:prstGeom prst="line">
+            <a:avLst/>
+          </a:prstGeom>
+          <a:ln w="7620">
+            <a:solidFill>
+              <a:srgbClr val="2E4756"/>
+            </a:solidFill>
+          </a:ln>
+          <a:effectLst/>
+        </p:spPr>
+      </p:cxnSp>
+      <p:sp>
+        <p:nvSpPr>
+          <p:cNvPr id="7" name="C3-E09 text 5" descr="sci-ppt:o005"/>
           <p:cNvSpPr txBox="1"/>
           <p:nvPr/>
         </p:nvSpPr>
         <p:spPr>
           <a:xfrm>
-            <a:off x="1645920" y="1874519"/>
-            <a:ext cx="1463040" cy="365760"/>
+            <a:off x="457200" y="5111496"/>
+            <a:ext cx="914400" cy="208407"/>
           </a:xfrm>
           <a:prstGeom prst="rect">
             <a:avLst/>
@@ -3218,7 +3242,697 @@
           <a:effectLst/>
         </p:spPr>
         <p:txBody>
-          <a:bodyPr wrap="square" lIns="27432" rIns="27432" tIns="18288" bIns="18288" anchor="ctr">
+          <a:bodyPr wrap="none" lIns="18288" rIns="18288" tIns="18288" bIns="18288" anchor="t">
+            <a:spAutoFit/>
+          </a:bodyPr>
+          <a:lstStyle/>
+          <a:p>
+            <a:pPr algn="ctr">
+              <a:spcAft>
+                <a:spcPts val="0"/>
+              </a:spcAft>
+            </a:pPr>
+            <a:r>
+              <a:rPr sz="1050" b="0" i="0">
+                <a:solidFill>
+                  <a:srgbClr val="B4C7D2"/>
+                </a:solidFill>
+                <a:latin typeface="Arial"/>
+              </a:rPr>
+              <a:t>0.00</a:t>
+            </a:r>
+          </a:p>
+        </p:txBody>
+      </p:sp>
+      <p:cxnSp>
+        <p:nvCxnSpPr>
+          <p:cNvPr id="8" name="C3-E09 line 6" descr="sci-ppt:o006"/>
+          <p:cNvCxnSpPr/>
+          <p:nvPr/>
+        </p:nvCxnSpPr>
+        <p:spPr>
+          <a:xfrm>
+            <a:off x="2423160" y="5029200"/>
+            <a:ext cx="0" cy="64008"/>
+          </a:xfrm>
+          <a:prstGeom prst="line">
+            <a:avLst/>
+          </a:prstGeom>
+          <a:ln w="12700">
+            <a:solidFill>
+              <a:srgbClr val="B4C7D2"/>
+            </a:solidFill>
+          </a:ln>
+          <a:effectLst/>
+        </p:spPr>
+      </p:cxnSp>
+      <p:cxnSp>
+        <p:nvCxnSpPr>
+          <p:cNvPr id="9" name="C3-E09 line 7" descr="sci-ppt:o007"/>
+          <p:cNvCxnSpPr/>
+          <p:nvPr/>
+        </p:nvCxnSpPr>
+        <p:spPr>
+          <a:xfrm>
+            <a:off x="2423160" y="1371600"/>
+            <a:ext cx="0" cy="3657600"/>
+          </a:xfrm>
+          <a:prstGeom prst="line">
+            <a:avLst/>
+          </a:prstGeom>
+          <a:ln w="7620">
+            <a:solidFill>
+              <a:srgbClr val="2E4756"/>
+            </a:solidFill>
+          </a:ln>
+          <a:effectLst/>
+        </p:spPr>
+      </p:cxnSp>
+      <p:sp>
+        <p:nvSpPr>
+          <p:cNvPr id="10" name="C3-E09 text 8" descr="sci-ppt:o008"/>
+          <p:cNvSpPr txBox="1"/>
+          <p:nvPr/>
+        </p:nvSpPr>
+        <p:spPr>
+          <a:xfrm>
+            <a:off x="1965960" y="5111496"/>
+            <a:ext cx="914400" cy="208407"/>
+          </a:xfrm>
+          <a:prstGeom prst="rect">
+            <a:avLst/>
+          </a:prstGeom>
+          <a:noFill/>
+          <a:effectLst/>
+        </p:spPr>
+        <p:txBody>
+          <a:bodyPr wrap="none" lIns="18288" rIns="18288" tIns="18288" bIns="18288" anchor="t">
+            <a:spAutoFit/>
+          </a:bodyPr>
+          <a:lstStyle/>
+          <a:p>
+            <a:pPr algn="ctr">
+              <a:spcAft>
+                <a:spcPts val="0"/>
+              </a:spcAft>
+            </a:pPr>
+            <a:r>
+              <a:rPr sz="1050" b="0" i="0">
+                <a:solidFill>
+                  <a:srgbClr val="B4C7D2"/>
+                </a:solidFill>
+                <a:latin typeface="Arial"/>
+              </a:rPr>
+              <a:t>0.25</a:t>
+            </a:r>
+          </a:p>
+        </p:txBody>
+      </p:sp>
+      <p:cxnSp>
+        <p:nvCxnSpPr>
+          <p:cNvPr id="11" name="C3-E09 line 9" descr="sci-ppt:o009"/>
+          <p:cNvCxnSpPr/>
+          <p:nvPr/>
+        </p:nvCxnSpPr>
+        <p:spPr>
+          <a:xfrm>
+            <a:off x="3931920" y="5029200"/>
+            <a:ext cx="0" cy="64008"/>
+          </a:xfrm>
+          <a:prstGeom prst="line">
+            <a:avLst/>
+          </a:prstGeom>
+          <a:ln w="12700">
+            <a:solidFill>
+              <a:srgbClr val="B4C7D2"/>
+            </a:solidFill>
+          </a:ln>
+          <a:effectLst/>
+        </p:spPr>
+      </p:cxnSp>
+      <p:cxnSp>
+        <p:nvCxnSpPr>
+          <p:cNvPr id="12" name="C3-E09 line 10" descr="sci-ppt:o010"/>
+          <p:cNvCxnSpPr/>
+          <p:nvPr/>
+        </p:nvCxnSpPr>
+        <p:spPr>
+          <a:xfrm>
+            <a:off x="3931920" y="1371600"/>
+            <a:ext cx="0" cy="3657600"/>
+          </a:xfrm>
+          <a:prstGeom prst="line">
+            <a:avLst/>
+          </a:prstGeom>
+          <a:ln w="7620">
+            <a:solidFill>
+              <a:srgbClr val="2E4756"/>
+            </a:solidFill>
+          </a:ln>
+          <a:effectLst/>
+        </p:spPr>
+      </p:cxnSp>
+      <p:sp>
+        <p:nvSpPr>
+          <p:cNvPr id="13" name="C3-E09 text 11" descr="sci-ppt:o011"/>
+          <p:cNvSpPr txBox="1"/>
+          <p:nvPr/>
+        </p:nvSpPr>
+        <p:spPr>
+          <a:xfrm>
+            <a:off x="3474720" y="5111496"/>
+            <a:ext cx="914400" cy="208407"/>
+          </a:xfrm>
+          <a:prstGeom prst="rect">
+            <a:avLst/>
+          </a:prstGeom>
+          <a:noFill/>
+          <a:effectLst/>
+        </p:spPr>
+        <p:txBody>
+          <a:bodyPr wrap="none" lIns="18288" rIns="18288" tIns="18288" bIns="18288" anchor="t">
+            <a:spAutoFit/>
+          </a:bodyPr>
+          <a:lstStyle/>
+          <a:p>
+            <a:pPr algn="ctr">
+              <a:spcAft>
+                <a:spcPts val="0"/>
+              </a:spcAft>
+            </a:pPr>
+            <a:r>
+              <a:rPr sz="1050" b="0" i="0">
+                <a:solidFill>
+                  <a:srgbClr val="B4C7D2"/>
+                </a:solidFill>
+                <a:latin typeface="Arial"/>
+              </a:rPr>
+              <a:t>0.50</a:t>
+            </a:r>
+          </a:p>
+        </p:txBody>
+      </p:sp>
+      <p:cxnSp>
+        <p:nvCxnSpPr>
+          <p:cNvPr id="14" name="C3-E09 line 12" descr="sci-ppt:o012"/>
+          <p:cNvCxnSpPr/>
+          <p:nvPr/>
+        </p:nvCxnSpPr>
+        <p:spPr>
+          <a:xfrm>
+            <a:off x="5440679" y="5029200"/>
+            <a:ext cx="0" cy="64008"/>
+          </a:xfrm>
+          <a:prstGeom prst="line">
+            <a:avLst/>
+          </a:prstGeom>
+          <a:ln w="12700">
+            <a:solidFill>
+              <a:srgbClr val="B4C7D2"/>
+            </a:solidFill>
+          </a:ln>
+          <a:effectLst/>
+        </p:spPr>
+      </p:cxnSp>
+      <p:cxnSp>
+        <p:nvCxnSpPr>
+          <p:cNvPr id="15" name="C3-E09 line 13" descr="sci-ppt:o013"/>
+          <p:cNvCxnSpPr/>
+          <p:nvPr/>
+        </p:nvCxnSpPr>
+        <p:spPr>
+          <a:xfrm>
+            <a:off x="5440679" y="1371600"/>
+            <a:ext cx="0" cy="3657600"/>
+          </a:xfrm>
+          <a:prstGeom prst="line">
+            <a:avLst/>
+          </a:prstGeom>
+          <a:ln w="7620">
+            <a:solidFill>
+              <a:srgbClr val="2E4756"/>
+            </a:solidFill>
+          </a:ln>
+          <a:effectLst/>
+        </p:spPr>
+      </p:cxnSp>
+      <p:sp>
+        <p:nvSpPr>
+          <p:cNvPr id="16" name="C3-E09 text 14" descr="sci-ppt:o014"/>
+          <p:cNvSpPr txBox="1"/>
+          <p:nvPr/>
+        </p:nvSpPr>
+        <p:spPr>
+          <a:xfrm>
+            <a:off x="4983479" y="5111496"/>
+            <a:ext cx="914400" cy="208407"/>
+          </a:xfrm>
+          <a:prstGeom prst="rect">
+            <a:avLst/>
+          </a:prstGeom>
+          <a:noFill/>
+          <a:effectLst/>
+        </p:spPr>
+        <p:txBody>
+          <a:bodyPr wrap="none" lIns="18288" rIns="18288" tIns="18288" bIns="18288" anchor="t">
+            <a:spAutoFit/>
+          </a:bodyPr>
+          <a:lstStyle/>
+          <a:p>
+            <a:pPr algn="ctr">
+              <a:spcAft>
+                <a:spcPts val="0"/>
+              </a:spcAft>
+            </a:pPr>
+            <a:r>
+              <a:rPr sz="1050" b="0" i="0">
+                <a:solidFill>
+                  <a:srgbClr val="B4C7D2"/>
+                </a:solidFill>
+                <a:latin typeface="Arial"/>
+              </a:rPr>
+              <a:t>0.75</a:t>
+            </a:r>
+          </a:p>
+        </p:txBody>
+      </p:sp>
+      <p:cxnSp>
+        <p:nvCxnSpPr>
+          <p:cNvPr id="17" name="C3-E09 line 15" descr="sci-ppt:o015"/>
+          <p:cNvCxnSpPr/>
+          <p:nvPr/>
+        </p:nvCxnSpPr>
+        <p:spPr>
+          <a:xfrm>
+            <a:off x="6949440" y="5029200"/>
+            <a:ext cx="0" cy="64008"/>
+          </a:xfrm>
+          <a:prstGeom prst="line">
+            <a:avLst/>
+          </a:prstGeom>
+          <a:ln w="12700">
+            <a:solidFill>
+              <a:srgbClr val="B4C7D2"/>
+            </a:solidFill>
+          </a:ln>
+          <a:effectLst/>
+        </p:spPr>
+      </p:cxnSp>
+      <p:cxnSp>
+        <p:nvCxnSpPr>
+          <p:cNvPr id="18" name="C3-E09 line 16" descr="sci-ppt:o016"/>
+          <p:cNvCxnSpPr/>
+          <p:nvPr/>
+        </p:nvCxnSpPr>
+        <p:spPr>
+          <a:xfrm>
+            <a:off x="6949440" y="1371600"/>
+            <a:ext cx="0" cy="3657600"/>
+          </a:xfrm>
+          <a:prstGeom prst="line">
+            <a:avLst/>
+          </a:prstGeom>
+          <a:ln w="7620">
+            <a:solidFill>
+              <a:srgbClr val="2E4756"/>
+            </a:solidFill>
+          </a:ln>
+          <a:effectLst/>
+        </p:spPr>
+      </p:cxnSp>
+      <p:sp>
+        <p:nvSpPr>
+          <p:cNvPr id="19" name="C3-E09 text 17" descr="sci-ppt:o017"/>
+          <p:cNvSpPr txBox="1"/>
+          <p:nvPr/>
+        </p:nvSpPr>
+        <p:spPr>
+          <a:xfrm>
+            <a:off x="6492240" y="5111496"/>
+            <a:ext cx="914400" cy="208407"/>
+          </a:xfrm>
+          <a:prstGeom prst="rect">
+            <a:avLst/>
+          </a:prstGeom>
+          <a:noFill/>
+          <a:effectLst/>
+        </p:spPr>
+        <p:txBody>
+          <a:bodyPr wrap="none" lIns="18288" rIns="18288" tIns="18288" bIns="18288" anchor="t">
+            <a:spAutoFit/>
+          </a:bodyPr>
+          <a:lstStyle/>
+          <a:p>
+            <a:pPr algn="ctr">
+              <a:spcAft>
+                <a:spcPts val="0"/>
+              </a:spcAft>
+            </a:pPr>
+            <a:r>
+              <a:rPr sz="1050" b="0" i="0">
+                <a:solidFill>
+                  <a:srgbClr val="B4C7D2"/>
+                </a:solidFill>
+                <a:latin typeface="Arial"/>
+              </a:rPr>
+              <a:t>1.00</a:t>
+            </a:r>
+          </a:p>
+        </p:txBody>
+      </p:sp>
+      <p:cxnSp>
+        <p:nvCxnSpPr>
+          <p:cNvPr id="20" name="C3-E09 line 18" descr="sci-ppt:o018"/>
+          <p:cNvCxnSpPr/>
+          <p:nvPr/>
+        </p:nvCxnSpPr>
+        <p:spPr>
+          <a:xfrm>
+            <a:off x="850392" y="5029200"/>
+            <a:ext cx="64008" cy="0"/>
+          </a:xfrm>
+          <a:prstGeom prst="line">
+            <a:avLst/>
+          </a:prstGeom>
+          <a:ln w="12700">
+            <a:solidFill>
+              <a:srgbClr val="B4C7D2"/>
+            </a:solidFill>
+          </a:ln>
+          <a:effectLst/>
+        </p:spPr>
+      </p:cxnSp>
+      <p:cxnSp>
+        <p:nvCxnSpPr>
+          <p:cNvPr id="21" name="C3-E09 line 19" descr="sci-ppt:o019"/>
+          <p:cNvCxnSpPr/>
+          <p:nvPr/>
+        </p:nvCxnSpPr>
+        <p:spPr>
+          <a:xfrm>
+            <a:off x="850392" y="3810000"/>
+            <a:ext cx="64008" cy="0"/>
+          </a:xfrm>
+          <a:prstGeom prst="line">
+            <a:avLst/>
+          </a:prstGeom>
+          <a:ln w="12700">
+            <a:solidFill>
+              <a:srgbClr val="B4C7D2"/>
+            </a:solidFill>
+          </a:ln>
+          <a:effectLst/>
+        </p:spPr>
+      </p:cxnSp>
+      <p:cxnSp>
+        <p:nvCxnSpPr>
+          <p:cNvPr id="22" name="C3-E09 line 20" descr="sci-ppt:o020"/>
+          <p:cNvCxnSpPr/>
+          <p:nvPr/>
+        </p:nvCxnSpPr>
+        <p:spPr>
+          <a:xfrm>
+            <a:off x="914400" y="3810000"/>
+            <a:ext cx="6035040" cy="0"/>
+          </a:xfrm>
+          <a:prstGeom prst="line">
+            <a:avLst/>
+          </a:prstGeom>
+          <a:ln w="7620">
+            <a:solidFill>
+              <a:srgbClr val="2E4756"/>
+            </a:solidFill>
+          </a:ln>
+          <a:effectLst/>
+        </p:spPr>
+      </p:cxnSp>
+      <p:sp>
+        <p:nvSpPr>
+          <p:cNvPr id="23" name="C3-E09 text 21" descr="sci-ppt:o021"/>
+          <p:cNvSpPr txBox="1"/>
+          <p:nvPr/>
+        </p:nvSpPr>
+        <p:spPr>
+          <a:xfrm>
+            <a:off x="45720" y="3727704"/>
+            <a:ext cx="777240" cy="208407"/>
+          </a:xfrm>
+          <a:prstGeom prst="rect">
+            <a:avLst/>
+          </a:prstGeom>
+          <a:noFill/>
+          <a:effectLst/>
+        </p:spPr>
+        <p:txBody>
+          <a:bodyPr wrap="none" lIns="18288" rIns="18288" tIns="18288" bIns="18288" anchor="t">
+            <a:spAutoFit/>
+          </a:bodyPr>
+          <a:lstStyle/>
+          <a:p>
+            <a:pPr algn="r">
+              <a:spcAft>
+                <a:spcPts val="0"/>
+              </a:spcAft>
+            </a:pPr>
+            <a:r>
+              <a:rPr sz="1050" b="0" i="0">
+                <a:solidFill>
+                  <a:srgbClr val="B4C7D2"/>
+                </a:solidFill>
+                <a:latin typeface="Arial"/>
+              </a:rPr>
+              <a:t>100</a:t>
+            </a:r>
+          </a:p>
+        </p:txBody>
+      </p:sp>
+      <p:cxnSp>
+        <p:nvCxnSpPr>
+          <p:cNvPr id="24" name="C3-E09 line 22" descr="sci-ppt:o022"/>
+          <p:cNvCxnSpPr/>
+          <p:nvPr/>
+        </p:nvCxnSpPr>
+        <p:spPr>
+          <a:xfrm>
+            <a:off x="850392" y="2590800"/>
+            <a:ext cx="64008" cy="0"/>
+          </a:xfrm>
+          <a:prstGeom prst="line">
+            <a:avLst/>
+          </a:prstGeom>
+          <a:ln w="12700">
+            <a:solidFill>
+              <a:srgbClr val="B4C7D2"/>
+            </a:solidFill>
+          </a:ln>
+          <a:effectLst/>
+        </p:spPr>
+      </p:cxnSp>
+      <p:cxnSp>
+        <p:nvCxnSpPr>
+          <p:cNvPr id="25" name="C3-E09 line 23" descr="sci-ppt:o023"/>
+          <p:cNvCxnSpPr/>
+          <p:nvPr/>
+        </p:nvCxnSpPr>
+        <p:spPr>
+          <a:xfrm>
+            <a:off x="914400" y="2590800"/>
+            <a:ext cx="6035040" cy="0"/>
+          </a:xfrm>
+          <a:prstGeom prst="line">
+            <a:avLst/>
+          </a:prstGeom>
+          <a:ln w="7620">
+            <a:solidFill>
+              <a:srgbClr val="2E4756"/>
+            </a:solidFill>
+          </a:ln>
+          <a:effectLst/>
+        </p:spPr>
+      </p:cxnSp>
+      <p:sp>
+        <p:nvSpPr>
+          <p:cNvPr id="26" name="C3-E09 text 24" descr="sci-ppt:o024"/>
+          <p:cNvSpPr txBox="1"/>
+          <p:nvPr/>
+        </p:nvSpPr>
+        <p:spPr>
+          <a:xfrm>
+            <a:off x="45720" y="2508504"/>
+            <a:ext cx="777240" cy="208407"/>
+          </a:xfrm>
+          <a:prstGeom prst="rect">
+            <a:avLst/>
+          </a:prstGeom>
+          <a:noFill/>
+          <a:effectLst/>
+        </p:spPr>
+        <p:txBody>
+          <a:bodyPr wrap="none" lIns="18288" rIns="18288" tIns="18288" bIns="18288" anchor="t">
+            <a:spAutoFit/>
+          </a:bodyPr>
+          <a:lstStyle/>
+          <a:p>
+            <a:pPr algn="r">
+              <a:spcAft>
+                <a:spcPts val="0"/>
+              </a:spcAft>
+            </a:pPr>
+            <a:r>
+              <a:rPr sz="1050" b="0" i="0">
+                <a:solidFill>
+                  <a:srgbClr val="B4C7D2"/>
+                </a:solidFill>
+                <a:latin typeface="Arial"/>
+              </a:rPr>
+              <a:t>200</a:t>
+            </a:r>
+          </a:p>
+        </p:txBody>
+      </p:sp>
+      <p:cxnSp>
+        <p:nvCxnSpPr>
+          <p:cNvPr id="27" name="C3-E09 line 25" descr="sci-ppt:o025"/>
+          <p:cNvCxnSpPr/>
+          <p:nvPr/>
+        </p:nvCxnSpPr>
+        <p:spPr>
+          <a:xfrm>
+            <a:off x="850392" y="1371600"/>
+            <a:ext cx="64008" cy="0"/>
+          </a:xfrm>
+          <a:prstGeom prst="line">
+            <a:avLst/>
+          </a:prstGeom>
+          <a:ln w="12700">
+            <a:solidFill>
+              <a:srgbClr val="B4C7D2"/>
+            </a:solidFill>
+          </a:ln>
+          <a:effectLst/>
+        </p:spPr>
+      </p:cxnSp>
+      <p:cxnSp>
+        <p:nvCxnSpPr>
+          <p:cNvPr id="28" name="C3-E09 line 26" descr="sci-ppt:o026"/>
+          <p:cNvCxnSpPr/>
+          <p:nvPr/>
+        </p:nvCxnSpPr>
+        <p:spPr>
+          <a:xfrm>
+            <a:off x="914400" y="1371600"/>
+            <a:ext cx="6035040" cy="0"/>
+          </a:xfrm>
+          <a:prstGeom prst="line">
+            <a:avLst/>
+          </a:prstGeom>
+          <a:ln w="7620">
+            <a:solidFill>
+              <a:srgbClr val="2E4756"/>
+            </a:solidFill>
+          </a:ln>
+          <a:effectLst/>
+        </p:spPr>
+      </p:cxnSp>
+      <p:sp>
+        <p:nvSpPr>
+          <p:cNvPr id="29" name="C3-E09 text 27" descr="sci-ppt:o027"/>
+          <p:cNvSpPr txBox="1"/>
+          <p:nvPr/>
+        </p:nvSpPr>
+        <p:spPr>
+          <a:xfrm>
+            <a:off x="45720" y="1289304"/>
+            <a:ext cx="777240" cy="208407"/>
+          </a:xfrm>
+          <a:prstGeom prst="rect">
+            <a:avLst/>
+          </a:prstGeom>
+          <a:noFill/>
+          <a:effectLst/>
+        </p:spPr>
+        <p:txBody>
+          <a:bodyPr wrap="none" lIns="18288" rIns="18288" tIns="18288" bIns="18288" anchor="t">
+            <a:spAutoFit/>
+          </a:bodyPr>
+          <a:lstStyle/>
+          <a:p>
+            <a:pPr algn="r">
+              <a:spcAft>
+                <a:spcPts val="0"/>
+              </a:spcAft>
+            </a:pPr>
+            <a:r>
+              <a:rPr sz="1050" b="0" i="0">
+                <a:solidFill>
+                  <a:srgbClr val="B4C7D2"/>
+                </a:solidFill>
+                <a:latin typeface="Arial"/>
+              </a:rPr>
+              <a:t>300</a:t>
+            </a:r>
+          </a:p>
+        </p:txBody>
+      </p:sp>
+      <p:sp>
+        <p:nvSpPr>
+          <p:cNvPr id="30" name="C3-E09 text 28" descr="sci-ppt:o028"/>
+          <p:cNvSpPr txBox="1"/>
+          <p:nvPr/>
+        </p:nvSpPr>
+        <p:spPr>
+          <a:xfrm>
+            <a:off x="914400" y="5312664"/>
+            <a:ext cx="6035040" cy="231648"/>
+          </a:xfrm>
+          <a:prstGeom prst="rect">
+            <a:avLst/>
+          </a:prstGeom>
+          <a:noFill/>
+          <a:effectLst/>
+        </p:spPr>
+        <p:txBody>
+          <a:bodyPr wrap="none" lIns="18288" rIns="18288" tIns="18288" bIns="18288" anchor="t">
+            <a:spAutoFit/>
+          </a:bodyPr>
+          <a:lstStyle/>
+          <a:p>
+            <a:pPr algn="ctr">
+              <a:spcAft>
+                <a:spcPts val="0"/>
+              </a:spcAft>
+            </a:pPr>
+            <a:r>
+              <a:rPr sz="1200" b="0" i="0">
+                <a:solidFill>
+                  <a:srgbClr val="E7F0F3"/>
+                </a:solidFill>
+                <a:latin typeface="Arial"/>
+              </a:rPr>
+              <a:t>R / Rₘₐₓ</a:t>
+            </a:r>
+          </a:p>
+        </p:txBody>
+      </p:sp>
+      <p:sp>
+        <p:nvSpPr>
+          <p:cNvPr id="31" name="C3-E09 text 29" descr="sci-ppt:o029"/>
+          <p:cNvSpPr txBox="1"/>
+          <p:nvPr/>
+        </p:nvSpPr>
+        <p:spPr>
+          <a:xfrm>
+            <a:off x="365760" y="1024128"/>
+            <a:ext cx="6035040" cy="231648"/>
+          </a:xfrm>
+          <a:prstGeom prst="rect">
+            <a:avLst/>
+          </a:prstGeom>
+          <a:noFill/>
+          <a:effectLst/>
+        </p:spPr>
+        <p:txBody>
+          <a:bodyPr wrap="none" lIns="18288" rIns="18288" tIns="18288" bIns="18288" anchor="t">
             <a:spAutoFit/>
           </a:bodyPr>
           <a:lstStyle/>
@@ -3229,27 +3943,1559 @@
               </a:spcAft>
             </a:pPr>
             <a:r>
-              <a:rPr sz="1700" b="0" i="0">
+              <a:rPr sz="1200" b="0" i="0">
                 <a:solidFill>
                   <a:srgbClr val="E7F0F3"/>
                 </a:solidFill>
                 <a:latin typeface="Arial"/>
               </a:rPr>
-              <a:t>j: source</a:t>
-            </a:r>
-          </a:p>
-        </p:txBody>
-      </p:sp>
-      <p:sp>
-        <p:nvSpPr>
-          <p:cNvPr id="6" name="C3-E09 text 4" descr="sci-ppt:o004"/>
+              <a:t>|Ṙ|  (m/s)</a:t>
+            </a:r>
+          </a:p>
+        </p:txBody>
+      </p:sp>
+      <p:sp>
+        <p:nvSpPr>
+          <p:cNvPr id="32" name="C3-E09 polygon 30" descr="sci-ppt:o030"/>
+          <p:cNvSpPr/>
+          <p:nvPr/>
+        </p:nvSpPr>
+        <p:spPr>
+          <a:xfrm>
+            <a:off x="1465829" y="1426323"/>
+            <a:ext cx="5483611" cy="3602877"/>
+          </a:xfrm>
+          <a:custGeom>
+            <a:avLst/>
+            <a:gdLst/>
+            <a:ahLst/>
+            <a:cxnLst/>
+            <a:rect l="l" t="t" r="r" b="b"/>
+            <a:pathLst>
+              <a:path w="5483611" h="3602877">
+                <a:moveTo>
+                  <a:pt x="0" y="0"/>
+                </a:moveTo>
+                <a:lnTo>
+                  <a:pt x="38753" y="349256"/>
+                </a:lnTo>
+                <a:lnTo>
+                  <a:pt x="77506" y="645586"/>
+                </a:lnTo>
+                <a:lnTo>
+                  <a:pt x="116260" y="899581"/>
+                </a:lnTo>
+                <a:lnTo>
+                  <a:pt x="155013" y="1119255"/>
+                </a:lnTo>
+                <a:lnTo>
+                  <a:pt x="193767" y="1310772"/>
+                </a:lnTo>
+                <a:lnTo>
+                  <a:pt x="232520" y="1478944"/>
+                </a:lnTo>
+                <a:lnTo>
+                  <a:pt x="271274" y="1627572"/>
+                </a:lnTo>
+                <a:lnTo>
+                  <a:pt x="310027" y="1759700"/>
+                </a:lnTo>
+                <a:lnTo>
+                  <a:pt x="348780" y="1877786"/>
+                </a:lnTo>
+                <a:lnTo>
+                  <a:pt x="387534" y="1983838"/>
+                </a:lnTo>
+                <a:lnTo>
+                  <a:pt x="426287" y="2079509"/>
+                </a:lnTo>
+                <a:lnTo>
+                  <a:pt x="465041" y="2166172"/>
+                </a:lnTo>
+                <a:lnTo>
+                  <a:pt x="503794" y="2244973"/>
+                </a:lnTo>
+                <a:lnTo>
+                  <a:pt x="542548" y="2316880"/>
+                </a:lnTo>
+                <a:lnTo>
+                  <a:pt x="581301" y="2382710"/>
+                </a:lnTo>
+                <a:lnTo>
+                  <a:pt x="620055" y="2443163"/>
+                </a:lnTo>
+                <a:lnTo>
+                  <a:pt x="658808" y="2498835"/>
+                </a:lnTo>
+                <a:lnTo>
+                  <a:pt x="697561" y="2550243"/>
+                </a:lnTo>
+                <a:lnTo>
+                  <a:pt x="736315" y="2597832"/>
+                </a:lnTo>
+                <a:lnTo>
+                  <a:pt x="775068" y="2641991"/>
+                </a:lnTo>
+                <a:lnTo>
+                  <a:pt x="813822" y="2683058"/>
+                </a:lnTo>
+                <a:lnTo>
+                  <a:pt x="852575" y="2721330"/>
+                </a:lnTo>
+                <a:lnTo>
+                  <a:pt x="891329" y="2757068"/>
+                </a:lnTo>
+                <a:lnTo>
+                  <a:pt x="930082" y="2790503"/>
+                </a:lnTo>
+                <a:lnTo>
+                  <a:pt x="968835" y="2821840"/>
+                </a:lnTo>
+                <a:lnTo>
+                  <a:pt x="1007589" y="2851259"/>
+                </a:lnTo>
+                <a:lnTo>
+                  <a:pt x="1046342" y="2878924"/>
+                </a:lnTo>
+                <a:lnTo>
+                  <a:pt x="1085096" y="2904979"/>
+                </a:lnTo>
+                <a:lnTo>
+                  <a:pt x="1123849" y="2929553"/>
+                </a:lnTo>
+                <a:lnTo>
+                  <a:pt x="1162603" y="2952764"/>
+                </a:lnTo>
+                <a:lnTo>
+                  <a:pt x="1201356" y="2974717"/>
+                </a:lnTo>
+                <a:lnTo>
+                  <a:pt x="1240109" y="2995506"/>
+                </a:lnTo>
+                <a:lnTo>
+                  <a:pt x="1278863" y="3015217"/>
+                </a:lnTo>
+                <a:lnTo>
+                  <a:pt x="1317616" y="3033930"/>
+                </a:lnTo>
+                <a:lnTo>
+                  <a:pt x="1356370" y="3051714"/>
+                </a:lnTo>
+                <a:lnTo>
+                  <a:pt x="1395123" y="3068633"/>
+                </a:lnTo>
+                <a:lnTo>
+                  <a:pt x="1433877" y="3084748"/>
+                </a:lnTo>
+                <a:lnTo>
+                  <a:pt x="1472630" y="3100112"/>
+                </a:lnTo>
+                <a:lnTo>
+                  <a:pt x="1511384" y="3114775"/>
+                </a:lnTo>
+                <a:lnTo>
+                  <a:pt x="1550137" y="3128781"/>
+                </a:lnTo>
+                <a:lnTo>
+                  <a:pt x="1588890" y="3142172"/>
+                </a:lnTo>
+                <a:lnTo>
+                  <a:pt x="1627644" y="3154986"/>
+                </a:lnTo>
+                <a:lnTo>
+                  <a:pt x="1666397" y="3167260"/>
+                </a:lnTo>
+                <a:lnTo>
+                  <a:pt x="1705151" y="3179025"/>
+                </a:lnTo>
+                <a:lnTo>
+                  <a:pt x="1743904" y="3190311"/>
+                </a:lnTo>
+                <a:lnTo>
+                  <a:pt x="1782658" y="3201147"/>
+                </a:lnTo>
+                <a:lnTo>
+                  <a:pt x="1821411" y="3211558"/>
+                </a:lnTo>
+                <a:lnTo>
+                  <a:pt x="1860164" y="3221569"/>
+                </a:lnTo>
+                <a:lnTo>
+                  <a:pt x="1898918" y="3231201"/>
+                </a:lnTo>
+                <a:lnTo>
+                  <a:pt x="1937671" y="3240475"/>
+                </a:lnTo>
+                <a:lnTo>
+                  <a:pt x="1976425" y="3249411"/>
+                </a:lnTo>
+                <a:lnTo>
+                  <a:pt x="2015178" y="3258027"/>
+                </a:lnTo>
+                <a:lnTo>
+                  <a:pt x="2053932" y="3266339"/>
+                </a:lnTo>
+                <a:lnTo>
+                  <a:pt x="2092685" y="3274363"/>
+                </a:lnTo>
+                <a:lnTo>
+                  <a:pt x="2131438" y="3282114"/>
+                </a:lnTo>
+                <a:lnTo>
+                  <a:pt x="2170192" y="3289606"/>
+                </a:lnTo>
+                <a:lnTo>
+                  <a:pt x="2208945" y="3296852"/>
+                </a:lnTo>
+                <a:lnTo>
+                  <a:pt x="2247699" y="3303863"/>
+                </a:lnTo>
+                <a:lnTo>
+                  <a:pt x="2286452" y="3310651"/>
+                </a:lnTo>
+                <a:lnTo>
+                  <a:pt x="2325206" y="3317228"/>
+                </a:lnTo>
+                <a:lnTo>
+                  <a:pt x="2363959" y="3323601"/>
+                </a:lnTo>
+                <a:lnTo>
+                  <a:pt x="2402712" y="3329783"/>
+                </a:lnTo>
+                <a:lnTo>
+                  <a:pt x="2441466" y="3335780"/>
+                </a:lnTo>
+                <a:lnTo>
+                  <a:pt x="2480219" y="3341602"/>
+                </a:lnTo>
+                <a:lnTo>
+                  <a:pt x="2518973" y="3347257"/>
+                </a:lnTo>
+                <a:lnTo>
+                  <a:pt x="2557726" y="3352751"/>
+                </a:lnTo>
+                <a:lnTo>
+                  <a:pt x="2596480" y="3358093"/>
+                </a:lnTo>
+                <a:lnTo>
+                  <a:pt x="2635233" y="3363289"/>
+                </a:lnTo>
+                <a:lnTo>
+                  <a:pt x="2673987" y="3368345"/>
+                </a:lnTo>
+                <a:lnTo>
+                  <a:pt x="2712740" y="3373268"/>
+                </a:lnTo>
+                <a:lnTo>
+                  <a:pt x="2751493" y="3378062"/>
+                </a:lnTo>
+                <a:lnTo>
+                  <a:pt x="2790247" y="3382734"/>
+                </a:lnTo>
+                <a:lnTo>
+                  <a:pt x="2829000" y="3387289"/>
+                </a:lnTo>
+                <a:lnTo>
+                  <a:pt x="2867754" y="3391731"/>
+                </a:lnTo>
+                <a:lnTo>
+                  <a:pt x="2906507" y="3396066"/>
+                </a:lnTo>
+                <a:lnTo>
+                  <a:pt x="2945261" y="3400297"/>
+                </a:lnTo>
+                <a:lnTo>
+                  <a:pt x="2984014" y="3404429"/>
+                </a:lnTo>
+                <a:lnTo>
+                  <a:pt x="3022767" y="3408466"/>
+                </a:lnTo>
+                <a:lnTo>
+                  <a:pt x="3061521" y="3412412"/>
+                </a:lnTo>
+                <a:lnTo>
+                  <a:pt x="3100274" y="3416271"/>
+                </a:lnTo>
+                <a:lnTo>
+                  <a:pt x="3139028" y="3420045"/>
+                </a:lnTo>
+                <a:lnTo>
+                  <a:pt x="3177781" y="3423739"/>
+                </a:lnTo>
+                <a:lnTo>
+                  <a:pt x="3216535" y="3427355"/>
+                </a:lnTo>
+                <a:lnTo>
+                  <a:pt x="3255288" y="3430898"/>
+                </a:lnTo>
+                <a:lnTo>
+                  <a:pt x="3294041" y="3434369"/>
+                </a:lnTo>
+                <a:lnTo>
+                  <a:pt x="3332795" y="3437771"/>
+                </a:lnTo>
+                <a:lnTo>
+                  <a:pt x="3371548" y="3441108"/>
+                </a:lnTo>
+                <a:lnTo>
+                  <a:pt x="3410302" y="3444382"/>
+                </a:lnTo>
+                <a:lnTo>
+                  <a:pt x="3449055" y="3447595"/>
+                </a:lnTo>
+                <a:lnTo>
+                  <a:pt x="3487809" y="3450750"/>
+                </a:lnTo>
+                <a:lnTo>
+                  <a:pt x="3526562" y="3453849"/>
+                </a:lnTo>
+                <a:lnTo>
+                  <a:pt x="3565316" y="3456895"/>
+                </a:lnTo>
+                <a:lnTo>
+                  <a:pt x="3604069" y="3459889"/>
+                </a:lnTo>
+                <a:lnTo>
+                  <a:pt x="3642822" y="3462835"/>
+                </a:lnTo>
+                <a:lnTo>
+                  <a:pt x="3681576" y="3465733"/>
+                </a:lnTo>
+                <a:lnTo>
+                  <a:pt x="3720329" y="3468587"/>
+                </a:lnTo>
+                <a:lnTo>
+                  <a:pt x="3759083" y="3471397"/>
+                </a:lnTo>
+                <a:lnTo>
+                  <a:pt x="3797836" y="3474166"/>
+                </a:lnTo>
+                <a:lnTo>
+                  <a:pt x="3836590" y="3476896"/>
+                </a:lnTo>
+                <a:lnTo>
+                  <a:pt x="3875343" y="3479589"/>
+                </a:lnTo>
+                <a:lnTo>
+                  <a:pt x="3914096" y="3482246"/>
+                </a:lnTo>
+                <a:lnTo>
+                  <a:pt x="3952850" y="3484869"/>
+                </a:lnTo>
+                <a:lnTo>
+                  <a:pt x="3991603" y="3487460"/>
+                </a:lnTo>
+                <a:lnTo>
+                  <a:pt x="4030357" y="3490020"/>
+                </a:lnTo>
+                <a:lnTo>
+                  <a:pt x="4069110" y="3492552"/>
+                </a:lnTo>
+                <a:lnTo>
+                  <a:pt x="4107864" y="3495057"/>
+                </a:lnTo>
+                <a:lnTo>
+                  <a:pt x="4146617" y="3497536"/>
+                </a:lnTo>
+                <a:lnTo>
+                  <a:pt x="4185370" y="3499992"/>
+                </a:lnTo>
+                <a:lnTo>
+                  <a:pt x="4224124" y="3502426"/>
+                </a:lnTo>
+                <a:lnTo>
+                  <a:pt x="4262877" y="3504840"/>
+                </a:lnTo>
+                <a:lnTo>
+                  <a:pt x="4301631" y="3507235"/>
+                </a:lnTo>
+                <a:lnTo>
+                  <a:pt x="4340384" y="3509614"/>
+                </a:lnTo>
+                <a:lnTo>
+                  <a:pt x="4379138" y="3511978"/>
+                </a:lnTo>
+                <a:lnTo>
+                  <a:pt x="4417891" y="3514329"/>
+                </a:lnTo>
+                <a:lnTo>
+                  <a:pt x="4456644" y="3516668"/>
+                </a:lnTo>
+                <a:lnTo>
+                  <a:pt x="4495398" y="3518999"/>
+                </a:lnTo>
+                <a:lnTo>
+                  <a:pt x="4534151" y="3521323"/>
+                </a:lnTo>
+                <a:lnTo>
+                  <a:pt x="4572905" y="3523642"/>
+                </a:lnTo>
+                <a:lnTo>
+                  <a:pt x="4611658" y="3525959"/>
+                </a:lnTo>
+                <a:lnTo>
+                  <a:pt x="4650412" y="3528276"/>
+                </a:lnTo>
+                <a:lnTo>
+                  <a:pt x="4689165" y="3530596"/>
+                </a:lnTo>
+                <a:lnTo>
+                  <a:pt x="4727919" y="3532922"/>
+                </a:lnTo>
+                <a:lnTo>
+                  <a:pt x="4766672" y="3535257"/>
+                </a:lnTo>
+                <a:lnTo>
+                  <a:pt x="4805425" y="3537605"/>
+                </a:lnTo>
+                <a:lnTo>
+                  <a:pt x="4844179" y="3539970"/>
+                </a:lnTo>
+                <a:lnTo>
+                  <a:pt x="4882932" y="3542357"/>
+                </a:lnTo>
+                <a:lnTo>
+                  <a:pt x="4921686" y="3544770"/>
+                </a:lnTo>
+                <a:lnTo>
+                  <a:pt x="4960439" y="3547216"/>
+                </a:lnTo>
+                <a:lnTo>
+                  <a:pt x="4999193" y="3549702"/>
+                </a:lnTo>
+                <a:lnTo>
+                  <a:pt x="5037946" y="3552236"/>
+                </a:lnTo>
+                <a:lnTo>
+                  <a:pt x="5076699" y="3554829"/>
+                </a:lnTo>
+                <a:lnTo>
+                  <a:pt x="5115453" y="3557494"/>
+                </a:lnTo>
+                <a:lnTo>
+                  <a:pt x="5154206" y="3560246"/>
+                </a:lnTo>
+                <a:lnTo>
+                  <a:pt x="5192960" y="3563107"/>
+                </a:lnTo>
+                <a:lnTo>
+                  <a:pt x="5231713" y="3566105"/>
+                </a:lnTo>
+                <a:lnTo>
+                  <a:pt x="5270467" y="3569280"/>
+                </a:lnTo>
+                <a:lnTo>
+                  <a:pt x="5309220" y="3572690"/>
+                </a:lnTo>
+                <a:lnTo>
+                  <a:pt x="5347973" y="3576431"/>
+                </a:lnTo>
+                <a:lnTo>
+                  <a:pt x="5386727" y="3580673"/>
+                </a:lnTo>
+                <a:lnTo>
+                  <a:pt x="5425480" y="3585790"/>
+                </a:lnTo>
+                <a:lnTo>
+                  <a:pt x="5464234" y="3593075"/>
+                </a:lnTo>
+                <a:lnTo>
+                  <a:pt x="5483611" y="3602877"/>
+                </a:lnTo>
+              </a:path>
+            </a:pathLst>
+          </a:custGeom>
+          <a:noFill/>
+          <a:ln w="38100">
+            <a:solidFill>
+              <a:srgbClr val="8EDBD4"/>
+            </a:solidFill>
+          </a:ln>
+          <a:effectLst/>
+        </p:spPr>
+        <p:txBody>
+          <a:bodyPr rtlCol="0" anchor="ctr"/>
+          <a:lstStyle/>
+          <a:p>
+            <a:pPr algn="ctr"/>
+          </a:p>
+        </p:txBody>
+      </p:sp>
+      <p:sp>
+        <p:nvSpPr>
+          <p:cNvPr id="33" name="C3-E09 ellipse 31" descr="sci-ppt:o031"/>
+          <p:cNvSpPr/>
+          <p:nvPr/>
+        </p:nvSpPr>
+        <p:spPr>
+          <a:xfrm>
+            <a:off x="3877056" y="4710958"/>
+            <a:ext cx="109728" cy="109728"/>
+          </a:xfrm>
+          <a:prstGeom prst="ellipse">
+            <a:avLst/>
+          </a:prstGeom>
+          <a:solidFill>
+            <a:srgbClr val="8EDBD4"/>
+          </a:solidFill>
+          <a:ln w="12700">
+            <a:solidFill>
+              <a:srgbClr val="8EDBD4"/>
+            </a:solidFill>
+          </a:ln>
+          <a:effectLst/>
+        </p:spPr>
+        <p:txBody>
+          <a:bodyPr rtlCol="0" anchor="ctr"/>
+          <a:lstStyle/>
+          <a:p>
+            <a:pPr algn="ctr"/>
+          </a:p>
+        </p:txBody>
+      </p:sp>
+      <p:sp>
+        <p:nvSpPr>
+          <p:cNvPr id="34" name="C3-E09 polygon 32" descr="sci-ppt:o032"/>
+          <p:cNvSpPr/>
+          <p:nvPr/>
+        </p:nvSpPr>
+        <p:spPr>
+          <a:xfrm>
+            <a:off x="1465829" y="1580438"/>
+            <a:ext cx="5483611" cy="3448762"/>
+          </a:xfrm>
+          <a:custGeom>
+            <a:avLst/>
+            <a:gdLst/>
+            <a:ahLst/>
+            <a:cxnLst/>
+            <a:rect l="l" t="t" r="r" b="b"/>
+            <a:pathLst>
+              <a:path w="5483611" h="3448762">
+                <a:moveTo>
+                  <a:pt x="0" y="0"/>
+                </a:moveTo>
+                <a:lnTo>
+                  <a:pt x="38753" y="343439"/>
+                </a:lnTo>
+                <a:lnTo>
+                  <a:pt x="77506" y="634481"/>
+                </a:lnTo>
+                <a:lnTo>
+                  <a:pt x="116260" y="883641"/>
+                </a:lnTo>
+                <a:lnTo>
+                  <a:pt x="155013" y="1098870"/>
+                </a:lnTo>
+                <a:lnTo>
+                  <a:pt x="193767" y="1286282"/>
+                </a:lnTo>
+                <a:lnTo>
+                  <a:pt x="232520" y="1450645"/>
+                </a:lnTo>
+                <a:lnTo>
+                  <a:pt x="271274" y="1595727"/>
+                </a:lnTo>
+                <a:lnTo>
+                  <a:pt x="310027" y="1724541"/>
+                </a:lnTo>
+                <a:lnTo>
+                  <a:pt x="348780" y="1839521"/>
+                </a:lnTo>
+                <a:lnTo>
+                  <a:pt x="387534" y="1942653"/>
+                </a:lnTo>
+                <a:lnTo>
+                  <a:pt x="426287" y="2035572"/>
+                </a:lnTo>
+                <a:lnTo>
+                  <a:pt x="465041" y="2119634"/>
+                </a:lnTo>
+                <a:lnTo>
+                  <a:pt x="503794" y="2195973"/>
+                </a:lnTo>
+                <a:lnTo>
+                  <a:pt x="542548" y="2265542"/>
+                </a:lnTo>
+                <a:lnTo>
+                  <a:pt x="581301" y="2329151"/>
+                </a:lnTo>
+                <a:lnTo>
+                  <a:pt x="620055" y="2387486"/>
+                </a:lnTo>
+                <a:lnTo>
+                  <a:pt x="658808" y="2441139"/>
+                </a:lnTo>
+                <a:lnTo>
+                  <a:pt x="697561" y="2490616"/>
+                </a:lnTo>
+                <a:lnTo>
+                  <a:pt x="736315" y="2536358"/>
+                </a:lnTo>
+                <a:lnTo>
+                  <a:pt x="775068" y="2578745"/>
+                </a:lnTo>
+                <a:lnTo>
+                  <a:pt x="813822" y="2618112"/>
+                </a:lnTo>
+                <a:lnTo>
+                  <a:pt x="852575" y="2654750"/>
+                </a:lnTo>
+                <a:lnTo>
+                  <a:pt x="891329" y="2688916"/>
+                </a:lnTo>
+                <a:lnTo>
+                  <a:pt x="930082" y="2720837"/>
+                </a:lnTo>
+                <a:lnTo>
+                  <a:pt x="968835" y="2750713"/>
+                </a:lnTo>
+                <a:lnTo>
+                  <a:pt x="1007589" y="2778723"/>
+                </a:lnTo>
+                <a:lnTo>
+                  <a:pt x="1046342" y="2805025"/>
+                </a:lnTo>
+                <a:lnTo>
+                  <a:pt x="1085096" y="2829763"/>
+                </a:lnTo>
+                <a:lnTo>
+                  <a:pt x="1123849" y="2853062"/>
+                </a:lnTo>
+                <a:lnTo>
+                  <a:pt x="1162603" y="2875037"/>
+                </a:lnTo>
+                <a:lnTo>
+                  <a:pt x="1201356" y="2895791"/>
+                </a:lnTo>
+                <a:lnTo>
+                  <a:pt x="1240109" y="2915417"/>
+                </a:lnTo>
+                <a:lnTo>
+                  <a:pt x="1278863" y="2933999"/>
+                </a:lnTo>
+                <a:lnTo>
+                  <a:pt x="1317616" y="2951613"/>
+                </a:lnTo>
+                <a:lnTo>
+                  <a:pt x="1356370" y="2968329"/>
+                </a:lnTo>
+                <a:lnTo>
+                  <a:pt x="1395123" y="2984210"/>
+                </a:lnTo>
+                <a:lnTo>
+                  <a:pt x="1433877" y="2999312"/>
+                </a:lnTo>
+                <a:lnTo>
+                  <a:pt x="1472630" y="3013690"/>
+                </a:lnTo>
+                <a:lnTo>
+                  <a:pt x="1511384" y="3027390"/>
+                </a:lnTo>
+                <a:lnTo>
+                  <a:pt x="1550137" y="3040457"/>
+                </a:lnTo>
+                <a:lnTo>
+                  <a:pt x="1588890" y="3052931"/>
+                </a:lnTo>
+                <a:lnTo>
+                  <a:pt x="1627644" y="3064850"/>
+                </a:lnTo>
+                <a:lnTo>
+                  <a:pt x="1666397" y="3076248"/>
+                </a:lnTo>
+                <a:lnTo>
+                  <a:pt x="1705151" y="3087156"/>
+                </a:lnTo>
+                <a:lnTo>
+                  <a:pt x="1743904" y="3097605"/>
+                </a:lnTo>
+                <a:lnTo>
+                  <a:pt x="1782658" y="3107621"/>
+                </a:lnTo>
+                <a:lnTo>
+                  <a:pt x="1821411" y="3117228"/>
+                </a:lnTo>
+                <a:lnTo>
+                  <a:pt x="1860164" y="3126451"/>
+                </a:lnTo>
+                <a:lnTo>
+                  <a:pt x="1898918" y="3135311"/>
+                </a:lnTo>
+                <a:lnTo>
+                  <a:pt x="1937671" y="3143828"/>
+                </a:lnTo>
+                <a:lnTo>
+                  <a:pt x="1976425" y="3152021"/>
+                </a:lnTo>
+                <a:lnTo>
+                  <a:pt x="2015178" y="3159907"/>
+                </a:lnTo>
+                <a:lnTo>
+                  <a:pt x="2053932" y="3167502"/>
+                </a:lnTo>
+                <a:lnTo>
+                  <a:pt x="2092685" y="3174822"/>
+                </a:lnTo>
+                <a:lnTo>
+                  <a:pt x="2131438" y="3181881"/>
+                </a:lnTo>
+                <a:lnTo>
+                  <a:pt x="2170192" y="3188692"/>
+                </a:lnTo>
+                <a:lnTo>
+                  <a:pt x="2208945" y="3195267"/>
+                </a:lnTo>
+                <a:lnTo>
+                  <a:pt x="2247699" y="3201619"/>
+                </a:lnTo>
+                <a:lnTo>
+                  <a:pt x="2286452" y="3207758"/>
+                </a:lnTo>
+                <a:lnTo>
+                  <a:pt x="2325206" y="3213694"/>
+                </a:lnTo>
+                <a:lnTo>
+                  <a:pt x="2363959" y="3219437"/>
+                </a:lnTo>
+                <a:lnTo>
+                  <a:pt x="2402712" y="3224997"/>
+                </a:lnTo>
+                <a:lnTo>
+                  <a:pt x="2441466" y="3230381"/>
+                </a:lnTo>
+                <a:lnTo>
+                  <a:pt x="2480219" y="3235598"/>
+                </a:lnTo>
+                <a:lnTo>
+                  <a:pt x="2518973" y="3240656"/>
+                </a:lnTo>
+                <a:lnTo>
+                  <a:pt x="2557726" y="3245561"/>
+                </a:lnTo>
+                <a:lnTo>
+                  <a:pt x="2596480" y="3250321"/>
+                </a:lnTo>
+                <a:lnTo>
+                  <a:pt x="2635233" y="3254942"/>
+                </a:lnTo>
+                <a:lnTo>
+                  <a:pt x="2673987" y="3259429"/>
+                </a:lnTo>
+                <a:lnTo>
+                  <a:pt x="2712740" y="3263790"/>
+                </a:lnTo>
+                <a:lnTo>
+                  <a:pt x="2751493" y="3268028"/>
+                </a:lnTo>
+                <a:lnTo>
+                  <a:pt x="2790247" y="3272151"/>
+                </a:lnTo>
+                <a:lnTo>
+                  <a:pt x="2829000" y="3276161"/>
+                </a:lnTo>
+                <a:lnTo>
+                  <a:pt x="2867754" y="3280064"/>
+                </a:lnTo>
+                <a:lnTo>
+                  <a:pt x="2906507" y="3283865"/>
+                </a:lnTo>
+                <a:lnTo>
+                  <a:pt x="2945261" y="3287567"/>
+                </a:lnTo>
+                <a:lnTo>
+                  <a:pt x="2984014" y="3291175"/>
+                </a:lnTo>
+                <a:lnTo>
+                  <a:pt x="3022767" y="3294693"/>
+                </a:lnTo>
+                <a:lnTo>
+                  <a:pt x="3061521" y="3298123"/>
+                </a:lnTo>
+                <a:lnTo>
+                  <a:pt x="3100274" y="3301470"/>
+                </a:lnTo>
+                <a:lnTo>
+                  <a:pt x="3139028" y="3304737"/>
+                </a:lnTo>
+                <a:lnTo>
+                  <a:pt x="3177781" y="3307928"/>
+                </a:lnTo>
+                <a:lnTo>
+                  <a:pt x="3216535" y="3311044"/>
+                </a:lnTo>
+                <a:lnTo>
+                  <a:pt x="3255288" y="3314089"/>
+                </a:lnTo>
+                <a:lnTo>
+                  <a:pt x="3294041" y="3317066"/>
+                </a:lnTo>
+                <a:lnTo>
+                  <a:pt x="3332795" y="3319978"/>
+                </a:lnTo>
+                <a:lnTo>
+                  <a:pt x="3371548" y="3322826"/>
+                </a:lnTo>
+                <a:lnTo>
+                  <a:pt x="3410302" y="3325614"/>
+                </a:lnTo>
+                <a:lnTo>
+                  <a:pt x="3449055" y="3328344"/>
+                </a:lnTo>
+                <a:lnTo>
+                  <a:pt x="3487809" y="3331017"/>
+                </a:lnTo>
+                <a:lnTo>
+                  <a:pt x="3526562" y="3333637"/>
+                </a:lnTo>
+                <a:lnTo>
+                  <a:pt x="3565316" y="3336206"/>
+                </a:lnTo>
+                <a:lnTo>
+                  <a:pt x="3604069" y="3338725"/>
+                </a:lnTo>
+                <a:lnTo>
+                  <a:pt x="3642822" y="3341196"/>
+                </a:lnTo>
+                <a:lnTo>
+                  <a:pt x="3681576" y="3343621"/>
+                </a:lnTo>
+                <a:lnTo>
+                  <a:pt x="3720329" y="3346002"/>
+                </a:lnTo>
+                <a:lnTo>
+                  <a:pt x="3759083" y="3348341"/>
+                </a:lnTo>
+                <a:lnTo>
+                  <a:pt x="3797836" y="3350640"/>
+                </a:lnTo>
+                <a:lnTo>
+                  <a:pt x="3836590" y="3352900"/>
+                </a:lnTo>
+                <a:lnTo>
+                  <a:pt x="3875343" y="3355123"/>
+                </a:lnTo>
+                <a:lnTo>
+                  <a:pt x="3914096" y="3357310"/>
+                </a:lnTo>
+                <a:lnTo>
+                  <a:pt x="3952850" y="3359463"/>
+                </a:lnTo>
+                <a:lnTo>
+                  <a:pt x="3991603" y="3361584"/>
+                </a:lnTo>
+                <a:lnTo>
+                  <a:pt x="4030357" y="3363674"/>
+                </a:lnTo>
+                <a:lnTo>
+                  <a:pt x="4069110" y="3365734"/>
+                </a:lnTo>
+                <a:lnTo>
+                  <a:pt x="4107864" y="3367766"/>
+                </a:lnTo>
+                <a:lnTo>
+                  <a:pt x="4146617" y="3369772"/>
+                </a:lnTo>
+                <a:lnTo>
+                  <a:pt x="4185370" y="3371752"/>
+                </a:lnTo>
+                <a:lnTo>
+                  <a:pt x="4224124" y="3373709"/>
+                </a:lnTo>
+                <a:lnTo>
+                  <a:pt x="4262877" y="3375643"/>
+                </a:lnTo>
+                <a:lnTo>
+                  <a:pt x="4301631" y="3377557"/>
+                </a:lnTo>
+                <a:lnTo>
+                  <a:pt x="4340384" y="3379451"/>
+                </a:lnTo>
+                <a:lnTo>
+                  <a:pt x="4379138" y="3381327"/>
+                </a:lnTo>
+                <a:lnTo>
+                  <a:pt x="4417891" y="3383187"/>
+                </a:lnTo>
+                <a:lnTo>
+                  <a:pt x="4456644" y="3385032"/>
+                </a:lnTo>
+                <a:lnTo>
+                  <a:pt x="4495398" y="3386863"/>
+                </a:lnTo>
+                <a:lnTo>
+                  <a:pt x="4534151" y="3388683"/>
+                </a:lnTo>
+                <a:lnTo>
+                  <a:pt x="4572905" y="3390493"/>
+                </a:lnTo>
+                <a:lnTo>
+                  <a:pt x="4611658" y="3392295"/>
+                </a:lnTo>
+                <a:lnTo>
+                  <a:pt x="4650412" y="3394090"/>
+                </a:lnTo>
+                <a:lnTo>
+                  <a:pt x="4689165" y="3395882"/>
+                </a:lnTo>
+                <a:lnTo>
+                  <a:pt x="4727919" y="3397671"/>
+                </a:lnTo>
+                <a:lnTo>
+                  <a:pt x="4766672" y="3399461"/>
+                </a:lnTo>
+                <a:lnTo>
+                  <a:pt x="4805425" y="3401254"/>
+                </a:lnTo>
+                <a:lnTo>
+                  <a:pt x="4844179" y="3403053"/>
+                </a:lnTo>
+                <a:lnTo>
+                  <a:pt x="4882932" y="3404861"/>
+                </a:lnTo>
+                <a:lnTo>
+                  <a:pt x="4921686" y="3406683"/>
+                </a:lnTo>
+                <a:lnTo>
+                  <a:pt x="4960439" y="3408522"/>
+                </a:lnTo>
+                <a:lnTo>
+                  <a:pt x="4999193" y="3410383"/>
+                </a:lnTo>
+                <a:lnTo>
+                  <a:pt x="5037946" y="3412273"/>
+                </a:lnTo>
+                <a:lnTo>
+                  <a:pt x="5076699" y="3414199"/>
+                </a:lnTo>
+                <a:lnTo>
+                  <a:pt x="5115453" y="3416170"/>
+                </a:lnTo>
+                <a:lnTo>
+                  <a:pt x="5154206" y="3418197"/>
+                </a:lnTo>
+                <a:lnTo>
+                  <a:pt x="5192960" y="3420296"/>
+                </a:lnTo>
+                <a:lnTo>
+                  <a:pt x="5231713" y="3422485"/>
+                </a:lnTo>
+                <a:lnTo>
+                  <a:pt x="5270467" y="3424793"/>
+                </a:lnTo>
+                <a:lnTo>
+                  <a:pt x="5309220" y="3427261"/>
+                </a:lnTo>
+                <a:lnTo>
+                  <a:pt x="5347973" y="3429956"/>
+                </a:lnTo>
+                <a:lnTo>
+                  <a:pt x="5386727" y="3432998"/>
+                </a:lnTo>
+                <a:lnTo>
+                  <a:pt x="5425480" y="3436650"/>
+                </a:lnTo>
+                <a:lnTo>
+                  <a:pt x="5464234" y="3441825"/>
+                </a:lnTo>
+                <a:lnTo>
+                  <a:pt x="5483611" y="3448762"/>
+                </a:lnTo>
+              </a:path>
+            </a:pathLst>
+          </a:custGeom>
+          <a:noFill/>
+          <a:ln w="38100">
+            <a:solidFill>
+              <a:srgbClr val="F2B880"/>
+            </a:solidFill>
+          </a:ln>
+          <a:effectLst/>
+        </p:spPr>
+        <p:txBody>
+          <a:bodyPr rtlCol="0" anchor="ctr"/>
+          <a:lstStyle/>
+          <a:p>
+            <a:pPr algn="ctr"/>
+          </a:p>
+        </p:txBody>
+      </p:sp>
+      <p:sp>
+        <p:nvSpPr>
+          <p:cNvPr id="35" name="C3-E09 ellipse 33" descr="sci-ppt:o033"/>
+          <p:cNvSpPr/>
+          <p:nvPr/>
+        </p:nvSpPr>
+        <p:spPr>
+          <a:xfrm>
+            <a:off x="3877056" y="4759289"/>
+            <a:ext cx="109728" cy="109728"/>
+          </a:xfrm>
+          <a:prstGeom prst="ellipse">
+            <a:avLst/>
+          </a:prstGeom>
+          <a:solidFill>
+            <a:srgbClr val="F2B880"/>
+          </a:solidFill>
+          <a:ln w="12700">
+            <a:solidFill>
+              <a:srgbClr val="F2B880"/>
+            </a:solidFill>
+          </a:ln>
+          <a:effectLst/>
+        </p:spPr>
+        <p:txBody>
+          <a:bodyPr rtlCol="0" anchor="ctr"/>
+          <a:lstStyle/>
+          <a:p>
+            <a:pPr algn="ctr"/>
+          </a:p>
+        </p:txBody>
+      </p:sp>
+      <p:sp>
+        <p:nvSpPr>
+          <p:cNvPr id="36" name="C3-E09 polygon 34" descr="sci-ppt:o034"/>
+          <p:cNvSpPr/>
+          <p:nvPr/>
+        </p:nvSpPr>
+        <p:spPr>
+          <a:xfrm>
+            <a:off x="1427075" y="1441165"/>
+            <a:ext cx="5522365" cy="3588035"/>
+          </a:xfrm>
+          <a:custGeom>
+            <a:avLst/>
+            <a:gdLst/>
+            <a:ahLst/>
+            <a:cxnLst/>
+            <a:rect l="l" t="t" r="r" b="b"/>
+            <a:pathLst>
+              <a:path w="5522365" h="3588035">
+                <a:moveTo>
+                  <a:pt x="0" y="0"/>
+                </a:moveTo>
+                <a:lnTo>
+                  <a:pt x="38754" y="396164"/>
+                </a:lnTo>
+                <a:lnTo>
+                  <a:pt x="77507" y="727125"/>
+                </a:lnTo>
+                <a:lnTo>
+                  <a:pt x="116260" y="1006839"/>
+                </a:lnTo>
+                <a:lnTo>
+                  <a:pt x="155014" y="1245658"/>
+                </a:lnTo>
+                <a:lnTo>
+                  <a:pt x="193767" y="1451399"/>
+                </a:lnTo>
+                <a:lnTo>
+                  <a:pt x="232521" y="1630068"/>
+                </a:lnTo>
+                <a:lnTo>
+                  <a:pt x="271274" y="1786343"/>
+                </a:lnTo>
+                <a:lnTo>
+                  <a:pt x="310028" y="1923916"/>
+                </a:lnTo>
+                <a:lnTo>
+                  <a:pt x="348781" y="2045736"/>
+                </a:lnTo>
+                <a:lnTo>
+                  <a:pt x="387534" y="2154184"/>
+                </a:lnTo>
+                <a:lnTo>
+                  <a:pt x="426288" y="2251198"/>
+                </a:lnTo>
+                <a:lnTo>
+                  <a:pt x="465041" y="2338373"/>
+                </a:lnTo>
+                <a:lnTo>
+                  <a:pt x="503795" y="2417031"/>
+                </a:lnTo>
+                <a:lnTo>
+                  <a:pt x="542548" y="2488274"/>
+                </a:lnTo>
+                <a:lnTo>
+                  <a:pt x="581302" y="2553029"/>
+                </a:lnTo>
+                <a:lnTo>
+                  <a:pt x="620055" y="2612082"/>
+                </a:lnTo>
+                <a:lnTo>
+                  <a:pt x="658809" y="2666098"/>
+                </a:lnTo>
+                <a:lnTo>
+                  <a:pt x="697562" y="2715651"/>
+                </a:lnTo>
+                <a:lnTo>
+                  <a:pt x="736315" y="2761229"/>
+                </a:lnTo>
+                <a:lnTo>
+                  <a:pt x="775069" y="2803259"/>
+                </a:lnTo>
+                <a:lnTo>
+                  <a:pt x="813822" y="2842108"/>
+                </a:lnTo>
+                <a:lnTo>
+                  <a:pt x="852576" y="2878096"/>
+                </a:lnTo>
+                <a:lnTo>
+                  <a:pt x="891329" y="2911506"/>
+                </a:lnTo>
+                <a:lnTo>
+                  <a:pt x="930083" y="2942584"/>
+                </a:lnTo>
+                <a:lnTo>
+                  <a:pt x="968836" y="2971548"/>
+                </a:lnTo>
+                <a:lnTo>
+                  <a:pt x="1007589" y="2998589"/>
+                </a:lnTo>
+                <a:lnTo>
+                  <a:pt x="1046343" y="3023878"/>
+                </a:lnTo>
+                <a:lnTo>
+                  <a:pt x="1085096" y="3047568"/>
+                </a:lnTo>
+                <a:lnTo>
+                  <a:pt x="1123850" y="3069794"/>
+                </a:lnTo>
+                <a:lnTo>
+                  <a:pt x="1162603" y="3090677"/>
+                </a:lnTo>
+                <a:lnTo>
+                  <a:pt x="1201357" y="3110326"/>
+                </a:lnTo>
+                <a:lnTo>
+                  <a:pt x="1240110" y="3128839"/>
+                </a:lnTo>
+                <a:lnTo>
+                  <a:pt x="1278863" y="3146304"/>
+                </a:lnTo>
+                <a:lnTo>
+                  <a:pt x="1317617" y="3162801"/>
+                </a:lnTo>
+                <a:lnTo>
+                  <a:pt x="1356370" y="3178402"/>
+                </a:lnTo>
+                <a:lnTo>
+                  <a:pt x="1395124" y="3193173"/>
+                </a:lnTo>
+                <a:lnTo>
+                  <a:pt x="1433877" y="3207172"/>
+                </a:lnTo>
+                <a:lnTo>
+                  <a:pt x="1472631" y="3220456"/>
+                </a:lnTo>
+                <a:lnTo>
+                  <a:pt x="1511384" y="3233072"/>
+                </a:lnTo>
+                <a:lnTo>
+                  <a:pt x="1550138" y="3245067"/>
+                </a:lnTo>
+                <a:lnTo>
+                  <a:pt x="1588891" y="3256481"/>
+                </a:lnTo>
+                <a:lnTo>
+                  <a:pt x="1627644" y="3267353"/>
+                </a:lnTo>
+                <a:lnTo>
+                  <a:pt x="1666398" y="3277718"/>
+                </a:lnTo>
+                <a:lnTo>
+                  <a:pt x="1705151" y="3287607"/>
+                </a:lnTo>
+                <a:lnTo>
+                  <a:pt x="1743905" y="3297051"/>
+                </a:lnTo>
+                <a:lnTo>
+                  <a:pt x="1782658" y="3306077"/>
+                </a:lnTo>
+                <a:lnTo>
+                  <a:pt x="1821412" y="3314709"/>
+                </a:lnTo>
+                <a:lnTo>
+                  <a:pt x="1860165" y="3322972"/>
+                </a:lnTo>
+                <a:lnTo>
+                  <a:pt x="1898918" y="3330886"/>
+                </a:lnTo>
+                <a:lnTo>
+                  <a:pt x="1937672" y="3338473"/>
+                </a:lnTo>
+                <a:lnTo>
+                  <a:pt x="1976425" y="3345750"/>
+                </a:lnTo>
+                <a:lnTo>
+                  <a:pt x="2015179" y="3352735"/>
+                </a:lnTo>
+                <a:lnTo>
+                  <a:pt x="2053932" y="3359444"/>
+                </a:lnTo>
+                <a:lnTo>
+                  <a:pt x="2092686" y="3365892"/>
+                </a:lnTo>
+                <a:lnTo>
+                  <a:pt x="2131439" y="3372093"/>
+                </a:lnTo>
+                <a:lnTo>
+                  <a:pt x="2170192" y="3378060"/>
+                </a:lnTo>
+                <a:lnTo>
+                  <a:pt x="2208946" y="3383806"/>
+                </a:lnTo>
+                <a:lnTo>
+                  <a:pt x="2247699" y="3389341"/>
+                </a:lnTo>
+                <a:lnTo>
+                  <a:pt x="2286453" y="3394677"/>
+                </a:lnTo>
+                <a:lnTo>
+                  <a:pt x="2325206" y="3399823"/>
+                </a:lnTo>
+                <a:lnTo>
+                  <a:pt x="2363960" y="3404789"/>
+                </a:lnTo>
+                <a:lnTo>
+                  <a:pt x="2402713" y="3409584"/>
+                </a:lnTo>
+                <a:lnTo>
+                  <a:pt x="2441466" y="3414216"/>
+                </a:lnTo>
+                <a:lnTo>
+                  <a:pt x="2480220" y="3418693"/>
+                </a:lnTo>
+                <a:lnTo>
+                  <a:pt x="2518973" y="3423022"/>
+                </a:lnTo>
+                <a:lnTo>
+                  <a:pt x="2557727" y="3427210"/>
+                </a:lnTo>
+                <a:lnTo>
+                  <a:pt x="2596480" y="3431263"/>
+                </a:lnTo>
+                <a:lnTo>
+                  <a:pt x="2635234" y="3435189"/>
+                </a:lnTo>
+                <a:lnTo>
+                  <a:pt x="2673987" y="3438992"/>
+                </a:lnTo>
+                <a:lnTo>
+                  <a:pt x="2712741" y="3442678"/>
+                </a:lnTo>
+                <a:lnTo>
+                  <a:pt x="2751494" y="3446252"/>
+                </a:lnTo>
+                <a:lnTo>
+                  <a:pt x="2790247" y="3449720"/>
+                </a:lnTo>
+                <a:lnTo>
+                  <a:pt x="2829001" y="3453086"/>
+                </a:lnTo>
+                <a:lnTo>
+                  <a:pt x="2867754" y="3456353"/>
+                </a:lnTo>
+                <a:lnTo>
+                  <a:pt x="2906508" y="3459528"/>
+                </a:lnTo>
+                <a:lnTo>
+                  <a:pt x="2945261" y="3462612"/>
+                </a:lnTo>
+                <a:lnTo>
+                  <a:pt x="2984015" y="3465611"/>
+                </a:lnTo>
+                <a:lnTo>
+                  <a:pt x="3022768" y="3468528"/>
+                </a:lnTo>
+                <a:lnTo>
+                  <a:pt x="3061521" y="3471366"/>
+                </a:lnTo>
+                <a:lnTo>
+                  <a:pt x="3100275" y="3474129"/>
+                </a:lnTo>
+                <a:lnTo>
+                  <a:pt x="3139028" y="3476819"/>
+                </a:lnTo>
+                <a:lnTo>
+                  <a:pt x="3177782" y="3479439"/>
+                </a:lnTo>
+                <a:lnTo>
+                  <a:pt x="3216535" y="3481993"/>
+                </a:lnTo>
+                <a:lnTo>
+                  <a:pt x="3255289" y="3484483"/>
+                </a:lnTo>
+                <a:lnTo>
+                  <a:pt x="3294042" y="3486911"/>
+                </a:lnTo>
+                <a:lnTo>
+                  <a:pt x="3332795" y="3489280"/>
+                </a:lnTo>
+                <a:lnTo>
+                  <a:pt x="3371549" y="3491593"/>
+                </a:lnTo>
+                <a:lnTo>
+                  <a:pt x="3410302" y="3493851"/>
+                </a:lnTo>
+                <a:lnTo>
+                  <a:pt x="3449056" y="3496057"/>
+                </a:lnTo>
+                <a:lnTo>
+                  <a:pt x="3487809" y="3498212"/>
+                </a:lnTo>
+                <a:lnTo>
+                  <a:pt x="3526563" y="3500319"/>
+                </a:lnTo>
+                <a:lnTo>
+                  <a:pt x="3565316" y="3502380"/>
+                </a:lnTo>
+                <a:lnTo>
+                  <a:pt x="3604070" y="3504397"/>
+                </a:lnTo>
+                <a:lnTo>
+                  <a:pt x="3642823" y="3506370"/>
+                </a:lnTo>
+                <a:lnTo>
+                  <a:pt x="3681576" y="3508302"/>
+                </a:lnTo>
+                <a:lnTo>
+                  <a:pt x="3720330" y="3510195"/>
+                </a:lnTo>
+                <a:lnTo>
+                  <a:pt x="3759083" y="3512050"/>
+                </a:lnTo>
+                <a:lnTo>
+                  <a:pt x="3797837" y="3513869"/>
+                </a:lnTo>
+                <a:lnTo>
+                  <a:pt x="3836590" y="3515652"/>
+                </a:lnTo>
+                <a:lnTo>
+                  <a:pt x="3875344" y="3517403"/>
+                </a:lnTo>
+                <a:lnTo>
+                  <a:pt x="3914097" y="3519120"/>
+                </a:lnTo>
+                <a:lnTo>
+                  <a:pt x="3952850" y="3520808"/>
+                </a:lnTo>
+                <a:lnTo>
+                  <a:pt x="3991604" y="3522465"/>
+                </a:lnTo>
+                <a:lnTo>
+                  <a:pt x="4030357" y="3524095"/>
+                </a:lnTo>
+                <a:lnTo>
+                  <a:pt x="4069111" y="3525697"/>
+                </a:lnTo>
+                <a:lnTo>
+                  <a:pt x="4107864" y="3527274"/>
+                </a:lnTo>
+                <a:lnTo>
+                  <a:pt x="4146618" y="3528826"/>
+                </a:lnTo>
+                <a:lnTo>
+                  <a:pt x="4185371" y="3530355"/>
+                </a:lnTo>
+                <a:lnTo>
+                  <a:pt x="4224124" y="3531862"/>
+                </a:lnTo>
+                <a:lnTo>
+                  <a:pt x="4262878" y="3533348"/>
+                </a:lnTo>
+                <a:lnTo>
+                  <a:pt x="4301631" y="3534813"/>
+                </a:lnTo>
+                <a:lnTo>
+                  <a:pt x="4340385" y="3536260"/>
+                </a:lnTo>
+                <a:lnTo>
+                  <a:pt x="4379138" y="3537690"/>
+                </a:lnTo>
+                <a:lnTo>
+                  <a:pt x="4417892" y="3539103"/>
+                </a:lnTo>
+                <a:lnTo>
+                  <a:pt x="4456645" y="3540501"/>
+                </a:lnTo>
+                <a:lnTo>
+                  <a:pt x="4495398" y="3541885"/>
+                </a:lnTo>
+                <a:lnTo>
+                  <a:pt x="4534152" y="3543256"/>
+                </a:lnTo>
+                <a:lnTo>
+                  <a:pt x="4572905" y="3544616"/>
+                </a:lnTo>
+                <a:lnTo>
+                  <a:pt x="4611659" y="3545965"/>
+                </a:lnTo>
+                <a:lnTo>
+                  <a:pt x="4650412" y="3547306"/>
+                </a:lnTo>
+                <a:lnTo>
+                  <a:pt x="4689166" y="3548639"/>
+                </a:lnTo>
+                <a:lnTo>
+                  <a:pt x="4727919" y="3549966"/>
+                </a:lnTo>
+                <a:lnTo>
+                  <a:pt x="4766673" y="3551289"/>
+                </a:lnTo>
+                <a:lnTo>
+                  <a:pt x="4805426" y="3552610"/>
+                </a:lnTo>
+                <a:lnTo>
+                  <a:pt x="4844179" y="3553930"/>
+                </a:lnTo>
+                <a:lnTo>
+                  <a:pt x="4882933" y="3555252"/>
+                </a:lnTo>
+                <a:lnTo>
+                  <a:pt x="4921686" y="3556578"/>
+                </a:lnTo>
+                <a:lnTo>
+                  <a:pt x="4960440" y="3557910"/>
+                </a:lnTo>
+                <a:lnTo>
+                  <a:pt x="4999193" y="3559253"/>
+                </a:lnTo>
+                <a:lnTo>
+                  <a:pt x="5037947" y="3560609"/>
+                </a:lnTo>
+                <a:lnTo>
+                  <a:pt x="5076700" y="3561983"/>
+                </a:lnTo>
+                <a:lnTo>
+                  <a:pt x="5115453" y="3563379"/>
+                </a:lnTo>
+                <a:lnTo>
+                  <a:pt x="5154207" y="3564806"/>
+                </a:lnTo>
+                <a:lnTo>
+                  <a:pt x="5192960" y="3566269"/>
+                </a:lnTo>
+                <a:lnTo>
+                  <a:pt x="5231714" y="3567781"/>
+                </a:lnTo>
+                <a:lnTo>
+                  <a:pt x="5270467" y="3569354"/>
+                </a:lnTo>
+                <a:lnTo>
+                  <a:pt x="5309221" y="3571009"/>
+                </a:lnTo>
+                <a:lnTo>
+                  <a:pt x="5347974" y="3572775"/>
+                </a:lnTo>
+                <a:lnTo>
+                  <a:pt x="5386727" y="3574699"/>
+                </a:lnTo>
+                <a:lnTo>
+                  <a:pt x="5425481" y="3576865"/>
+                </a:lnTo>
+                <a:lnTo>
+                  <a:pt x="5464234" y="3579460"/>
+                </a:lnTo>
+                <a:lnTo>
+                  <a:pt x="5502988" y="3583128"/>
+                </a:lnTo>
+                <a:lnTo>
+                  <a:pt x="5522365" y="3588035"/>
+                </a:lnTo>
+              </a:path>
+            </a:pathLst>
+          </a:custGeom>
+          <a:noFill/>
+          <a:ln w="38100">
+            <a:solidFill>
+              <a:srgbClr val="F28BA0"/>
+            </a:solidFill>
+          </a:ln>
+          <a:effectLst/>
+        </p:spPr>
+        <p:txBody>
+          <a:bodyPr rtlCol="0" anchor="ctr"/>
+          <a:lstStyle/>
+          <a:p>
+            <a:pPr algn="ctr"/>
+          </a:p>
+        </p:txBody>
+      </p:sp>
+      <p:sp>
+        <p:nvSpPr>
+          <p:cNvPr id="37" name="C3-E09 ellipse 35" descr="sci-ppt:o035"/>
+          <p:cNvSpPr/>
+          <p:nvPr/>
+        </p:nvSpPr>
+        <p:spPr>
+          <a:xfrm>
+            <a:off x="3877056" y="4807761"/>
+            <a:ext cx="109728" cy="109728"/>
+          </a:xfrm>
+          <a:prstGeom prst="ellipse">
+            <a:avLst/>
+          </a:prstGeom>
+          <a:solidFill>
+            <a:srgbClr val="F28BA0"/>
+          </a:solidFill>
+          <a:ln w="12700">
+            <a:solidFill>
+              <a:srgbClr val="F28BA0"/>
+            </a:solidFill>
+          </a:ln>
+          <a:effectLst/>
+        </p:spPr>
+        <p:txBody>
+          <a:bodyPr rtlCol="0" anchor="ctr"/>
+          <a:lstStyle/>
+          <a:p>
+            <a:pPr algn="ctr"/>
+          </a:p>
+        </p:txBody>
+      </p:sp>
+      <p:sp>
+        <p:nvSpPr>
+          <p:cNvPr id="38" name="C3-E09 rect 36" descr="sci-ppt:o036"/>
+          <p:cNvSpPr/>
+          <p:nvPr/>
+        </p:nvSpPr>
+        <p:spPr>
+          <a:xfrm>
+            <a:off x="3657600" y="1481328"/>
+            <a:ext cx="274320" cy="182880"/>
+          </a:xfrm>
+          <a:prstGeom prst="rect">
+            <a:avLst/>
+          </a:prstGeom>
+          <a:solidFill>
+            <a:srgbClr val="8EDBD4"/>
+          </a:solidFill>
+          <a:ln w="12700">
+            <a:solidFill>
+              <a:srgbClr val="8EDBD4"/>
+            </a:solidFill>
+          </a:ln>
+          <a:effectLst/>
+        </p:spPr>
+        <p:txBody>
+          <a:bodyPr rtlCol="0" anchor="ctr"/>
+          <a:lstStyle/>
+          <a:p>
+            <a:pPr algn="ctr"/>
+          </a:p>
+        </p:txBody>
+      </p:sp>
+      <p:sp>
+        <p:nvSpPr>
+          <p:cNvPr id="39" name="C3-E09 text 37" descr="sci-ppt:o037"/>
           <p:cNvSpPr txBox="1"/>
           <p:nvPr/>
         </p:nvSpPr>
         <p:spPr>
           <a:xfrm>
-            <a:off x="8138160" y="1874519"/>
-            <a:ext cx="1554480" cy="365760"/>
+            <a:off x="4041648" y="1435608"/>
+            <a:ext cx="2926080" cy="223900"/>
           </a:xfrm>
           <a:prstGeom prst="rect">
             <a:avLst/>
@@ -3258,563 +5504,7 @@
           <a:effectLst/>
         </p:spPr>
         <p:txBody>
-          <a:bodyPr wrap="square" lIns="27432" rIns="27432" tIns="18288" bIns="18288" anchor="ctr">
-            <a:spAutoFit/>
-          </a:bodyPr>
-          <a:lstStyle/>
-          <a:p>
-            <a:pPr algn="l">
-              <a:spcAft>
-                <a:spcPts val="0"/>
-              </a:spcAft>
-            </a:pPr>
-            <a:r>
-              <a:rPr sz="1700" b="0" i="0">
-                <a:solidFill>
-                  <a:srgbClr val="E7F0F3"/>
-                </a:solidFill>
-                <a:latin typeface="Arial"/>
-              </a:rPr>
-              <a:t>i: receiver</a:t>
-            </a:r>
-          </a:p>
-        </p:txBody>
-      </p:sp>
-      <p:cxnSp>
-        <p:nvCxnSpPr>
-          <p:cNvPr id="7" name="C3-E09 line 5" descr="sci-ppt:o005"/>
-          <p:cNvCxnSpPr/>
-          <p:nvPr/>
-        </p:nvCxnSpPr>
-        <p:spPr>
-          <a:xfrm>
-            <a:off x="2194560" y="3108960"/>
-            <a:ext cx="6492240" cy="0"/>
-          </a:xfrm>
-          <a:prstGeom prst="line">
-            <a:avLst/>
-          </a:prstGeom>
-          <a:ln w="25400">
-            <a:solidFill>
-              <a:srgbClr val="8EDBD4"/>
-            </a:solidFill>
-          </a:ln>
-          <a:effectLst/>
-        </p:spPr>
-      </p:cxnSp>
-      <p:sp>
-        <p:nvSpPr>
-          <p:cNvPr id="8" name="C3-E09 text 6" descr="sci-ppt:o006"/>
-          <p:cNvSpPr txBox="1"/>
-          <p:nvPr/>
-        </p:nvSpPr>
-        <p:spPr>
-          <a:xfrm>
-            <a:off x="4846320" y="3200400"/>
-            <a:ext cx="1828800" cy="365760"/>
-          </a:xfrm>
-          <a:prstGeom prst="rect">
-            <a:avLst/>
-          </a:prstGeom>
-          <a:noFill/>
-          <a:effectLst/>
-        </p:spPr>
-        <p:txBody>
-          <a:bodyPr wrap="square" lIns="27432" rIns="27432" tIns="18288" bIns="18288" anchor="ctr">
-            <a:spAutoFit/>
-          </a:bodyPr>
-          <a:lstStyle/>
-          <a:p>
-            <a:pPr algn="l">
-              <a:spcAft>
-                <a:spcPts val="0"/>
-              </a:spcAft>
-            </a:pPr>
-            <a:r>
-              <a:rPr sz="1700" b="0" i="0">
-                <a:solidFill>
-                  <a:srgbClr val="E7F0F3"/>
-                </a:solidFill>
-                <a:latin typeface="Arial"/>
-              </a:rPr>
-              <a:t>d_ij</a:t>
-            </a:r>
-          </a:p>
-        </p:txBody>
-      </p:sp>
-      <p:cxnSp>
-        <p:nvCxnSpPr>
-          <p:cNvPr id="9" name="C3-E09 arrow 7" descr="sci-ppt:o007"/>
-          <p:cNvCxnSpPr/>
-          <p:nvPr/>
-        </p:nvCxnSpPr>
-        <p:spPr>
-          <a:xfrm>
-            <a:off x="3108960" y="2057400"/>
-            <a:ext cx="4617719" cy="0"/>
-          </a:xfrm>
-          <a:prstGeom prst="line">
-            <a:avLst/>
-          </a:prstGeom>
-          <a:ln w="25400">
-            <a:solidFill>
-              <a:srgbClr val="8EDBD4"/>
-            </a:solidFill>
-            <a:headEnd type="none" w="med" len="med"/>
-            <a:tailEnd type="triangle" w="med" len="med"/>
-          </a:ln>
-          <a:effectLst/>
-        </p:spPr>
-      </p:cxnSp>
-      <p:sp>
-        <p:nvSpPr>
-          <p:cNvPr id="10" name="C3-E09 text 8" descr="sci-ppt:o008"/>
-          <p:cNvSpPr txBox="1"/>
-          <p:nvPr/>
-        </p:nvSpPr>
-        <p:spPr>
-          <a:xfrm>
-            <a:off x="3749039" y="1600200"/>
-            <a:ext cx="3931920" cy="365760"/>
-          </a:xfrm>
-          <a:prstGeom prst="rect">
-            <a:avLst/>
-          </a:prstGeom>
-          <a:noFill/>
-          <a:effectLst/>
-        </p:spPr>
-        <p:txBody>
-          <a:bodyPr wrap="square" lIns="27432" rIns="27432" tIns="18288" bIns="18288" anchor="ctr">
-            <a:spAutoFit/>
-          </a:bodyPr>
-          <a:lstStyle/>
-          <a:p>
-            <a:pPr algn="l">
-              <a:spcAft>
-                <a:spcPts val="0"/>
-              </a:spcAft>
-            </a:pPr>
-            <a:r>
-              <a:rPr sz="1800" b="0" i="0">
-                <a:solidFill>
-                  <a:srgbClr val="E7F0F3"/>
-                </a:solidFill>
-                <a:latin typeface="Arial"/>
-              </a:rPr>
-              <a:t>Shared liquid: ρ, p∞</a:t>
-            </a:r>
-          </a:p>
-        </p:txBody>
-      </p:sp>
-      <p:sp>
-        <p:nvSpPr>
-          <p:cNvPr id="11" name="C3-E09 text 9" descr="sci-ppt:o009"/>
-          <p:cNvSpPr txBox="1"/>
-          <p:nvPr/>
-        </p:nvSpPr>
-        <p:spPr>
-          <a:xfrm>
-            <a:off x="548640" y="777240"/>
-            <a:ext cx="10972800" cy="411480"/>
-          </a:xfrm>
-          <a:prstGeom prst="rect">
-            <a:avLst/>
-          </a:prstGeom>
-          <a:noFill/>
-          <a:effectLst/>
-        </p:spPr>
-        <p:txBody>
-          <a:bodyPr wrap="square" lIns="27432" rIns="27432" tIns="18288" bIns="18288" anchor="ctr">
-            <a:spAutoFit/>
-          </a:bodyPr>
-          <a:lstStyle/>
-          <a:p>
-            <a:pPr algn="l">
-              <a:spcAft>
-                <a:spcPts val="0"/>
-              </a:spcAft>
-            </a:pPr>
-            <a:r>
-              <a:rPr sz="1800" b="0" i="0">
-                <a:solidFill>
-                  <a:srgbClr val="E7F0F3"/>
-                </a:solidFill>
-                <a:latin typeface="Arial"/>
-              </a:rPr>
-              <a:t>Fixed centres; spherical cavities; R_i, R_j ≪ d_ij</a:t>
-            </a:r>
-          </a:p>
-        </p:txBody>
-      </p:sp>
-      <p:cxnSp>
-        <p:nvCxnSpPr>
-          <p:cNvPr id="12" name="C3-E09 arrow 10" descr="sci-ppt:o010"/>
-          <p:cNvCxnSpPr/>
-          <p:nvPr/>
-        </p:nvCxnSpPr>
-        <p:spPr>
-          <a:xfrm>
-            <a:off x="1051560" y="2057400"/>
-            <a:ext cx="347472" cy="0"/>
-          </a:xfrm>
-          <a:prstGeom prst="line">
-            <a:avLst/>
-          </a:prstGeom>
-          <a:ln w="25400">
-            <a:solidFill>
-              <a:srgbClr val="8EDBD4"/>
-            </a:solidFill>
-            <a:headEnd type="none" w="med" len="med"/>
-            <a:tailEnd type="triangle" w="med" len="med"/>
-          </a:ln>
-          <a:effectLst/>
-        </p:spPr>
-      </p:cxnSp>
-      <p:cxnSp>
-        <p:nvCxnSpPr>
-          <p:cNvPr id="13" name="C3-E09 arrow 11" descr="sci-ppt:o011"/>
-          <p:cNvCxnSpPr/>
-          <p:nvPr/>
-        </p:nvCxnSpPr>
-        <p:spPr>
-          <a:xfrm flipH="1">
-            <a:off x="2990088" y="2057400"/>
-            <a:ext cx="347472" cy="0"/>
-          </a:xfrm>
-          <a:prstGeom prst="line">
-            <a:avLst/>
-          </a:prstGeom>
-          <a:ln w="25400">
-            <a:solidFill>
-              <a:srgbClr val="8EDBD4"/>
-            </a:solidFill>
-            <a:headEnd type="none" w="med" len="med"/>
-            <a:tailEnd type="triangle" w="med" len="med"/>
-          </a:ln>
-          <a:effectLst/>
-        </p:spPr>
-      </p:cxnSp>
-      <p:sp>
-        <p:nvSpPr>
-          <p:cNvPr id="14" name="C3-E09 text 12" descr="sci-ppt:o012"/>
-          <p:cNvSpPr txBox="1"/>
-          <p:nvPr/>
-        </p:nvSpPr>
-        <p:spPr>
-          <a:xfrm>
-            <a:off x="3703320" y="2423160"/>
-            <a:ext cx="4114800" cy="457200"/>
-          </a:xfrm>
-          <a:prstGeom prst="rect">
-            <a:avLst/>
-          </a:prstGeom>
-          <a:noFill/>
-          <a:effectLst/>
-        </p:spPr>
-        <p:txBody>
-          <a:bodyPr wrap="square" lIns="27432" rIns="27432" tIns="18288" bIns="18288" anchor="ctr">
-            <a:spAutoFit/>
-          </a:bodyPr>
-          <a:lstStyle/>
-          <a:p>
-            <a:pPr algn="l">
-              <a:spcAft>
-                <a:spcPts val="0"/>
-              </a:spcAft>
-            </a:pPr>
-            <a:r>
-              <a:rPr sz="1800" b="0" i="0">
-                <a:solidFill>
-                  <a:srgbClr val="8EDBD4"/>
-                </a:solidFill>
-                <a:latin typeface="Arial"/>
-              </a:rPr>
-              <a:t>Collapse branch: Ṙ &lt; 0</a:t>
-            </a:r>
-          </a:p>
-        </p:txBody>
-      </p:sp>
-      <p:sp>
-        <p:nvSpPr>
-          <p:cNvPr id="15" name="C3-E09 text 13" descr="sci-ppt:o013"/>
-          <p:cNvSpPr txBox="1"/>
-          <p:nvPr/>
-        </p:nvSpPr>
-        <p:spPr>
-          <a:xfrm>
-            <a:off x="731520" y="3611880"/>
-            <a:ext cx="10789920" cy="274320"/>
-          </a:xfrm>
-          <a:prstGeom prst="rect">
-            <a:avLst/>
-          </a:prstGeom>
-          <a:noFill/>
-          <a:effectLst/>
-        </p:spPr>
-        <p:txBody>
-          <a:bodyPr wrap="square" lIns="27432" rIns="27432" tIns="18288" bIns="18288" anchor="ctr">
-            <a:spAutoFit/>
-          </a:bodyPr>
-          <a:lstStyle/>
-          <a:p>
-            <a:pPr algn="l">
-              <a:spcAft>
-                <a:spcPts val="0"/>
-              </a:spcAft>
-            </a:pPr>
-            <a:r>
-              <a:rPr sz="1600" b="0" i="0">
-                <a:solidFill>
-                  <a:srgbClr val="E7F0F3"/>
-                </a:solidFill>
-                <a:latin typeface="Arial"/>
-              </a:rPr>
-              <a:t>Interaction increases effective liquid inertia; it adds no source energy.</a:t>
-            </a:r>
-          </a:p>
-        </p:txBody>
-      </p:sp>
-      <p:cxnSp>
-        <p:nvCxnSpPr>
-          <p:cNvPr id="16" name="C3-E09 line 14" descr="sci-ppt:o014"/>
-          <p:cNvCxnSpPr/>
-          <p:nvPr/>
-        </p:nvCxnSpPr>
-        <p:spPr>
-          <a:xfrm>
-            <a:off x="274320" y="3977639"/>
-            <a:ext cx="11612880" cy="0"/>
-          </a:xfrm>
-          <a:prstGeom prst="line">
-            <a:avLst/>
-          </a:prstGeom>
-          <a:ln w="12700">
-            <a:solidFill>
-              <a:srgbClr val="405967"/>
-            </a:solidFill>
-          </a:ln>
-          <a:effectLst/>
-        </p:spPr>
-      </p:cxnSp>
-      <p:sp>
-        <p:nvSpPr>
-          <p:cNvPr id="17" name="C3-E09 text 15" descr="sci-ppt:o015"/>
-          <p:cNvSpPr txBox="1"/>
-          <p:nvPr/>
-        </p:nvSpPr>
-        <p:spPr>
-          <a:xfrm>
-            <a:off x="320040" y="4096512"/>
-            <a:ext cx="5715000" cy="246888"/>
-          </a:xfrm>
-          <a:prstGeom prst="rect">
-            <a:avLst/>
-          </a:prstGeom>
-          <a:noFill/>
-          <a:effectLst/>
-        </p:spPr>
-        <p:txBody>
-          <a:bodyPr wrap="square" lIns="27432" rIns="27432" tIns="18288" bIns="18288" anchor="ctr">
-            <a:spAutoFit/>
-          </a:bodyPr>
-          <a:lstStyle/>
-          <a:p>
-            <a:pPr algn="l">
-              <a:spcAft>
-                <a:spcPts val="0"/>
-              </a:spcAft>
-            </a:pPr>
-            <a:r>
-              <a:rPr sz="1150" b="0" i="0">
-                <a:solidFill>
-                  <a:srgbClr val="B4C7D2"/>
-                </a:solidFill>
-                <a:latin typeface="Arial"/>
-              </a:rPr>
-              <a:t>• R_max initial radius</a:t>
-            </a:r>
-          </a:p>
-        </p:txBody>
-      </p:sp>
-      <p:sp>
-        <p:nvSpPr>
-          <p:cNvPr id="18" name="C3-E09 text 16" descr="sci-ppt:o016"/>
-          <p:cNvSpPr txBox="1"/>
-          <p:nvPr/>
-        </p:nvSpPr>
-        <p:spPr>
-          <a:xfrm>
-            <a:off x="6217920" y="4096512"/>
-            <a:ext cx="5715000" cy="246888"/>
-          </a:xfrm>
-          <a:prstGeom prst="rect">
-            <a:avLst/>
-          </a:prstGeom>
-          <a:noFill/>
-          <a:effectLst/>
-        </p:spPr>
-        <p:txBody>
-          <a:bodyPr wrap="square" lIns="27432" rIns="27432" tIns="18288" bIns="18288" anchor="ctr">
-            <a:spAutoFit/>
-          </a:bodyPr>
-          <a:lstStyle/>
-          <a:p>
-            <a:pPr algn="l">
-              <a:spcAft>
-                <a:spcPts val="0"/>
-              </a:spcAft>
-            </a:pPr>
-            <a:r>
-              <a:rPr sz="1150" b="0" i="0">
-                <a:solidFill>
-                  <a:srgbClr val="B4C7D2"/>
-                </a:solidFill>
-                <a:latin typeface="Arial"/>
-              </a:rPr>
-              <a:t>• R contracting radius; ξ integration radius</a:t>
-            </a:r>
-          </a:p>
-        </p:txBody>
-      </p:sp>
-      <p:sp>
-        <p:nvSpPr>
-          <p:cNvPr id="19" name="C3-E09 text 17" descr="sci-ppt:o017"/>
-          <p:cNvSpPr txBox="1"/>
-          <p:nvPr/>
-        </p:nvSpPr>
-        <p:spPr>
-          <a:xfrm>
-            <a:off x="320040" y="4329684"/>
-            <a:ext cx="5715000" cy="246888"/>
-          </a:xfrm>
-          <a:prstGeom prst="rect">
-            <a:avLst/>
-          </a:prstGeom>
-          <a:noFill/>
-          <a:effectLst/>
-        </p:spPr>
-        <p:txBody>
-          <a:bodyPr wrap="square" lIns="27432" rIns="27432" tIns="18288" bIns="18288" anchor="ctr">
-            <a:spAutoFit/>
-          </a:bodyPr>
-          <a:lstStyle/>
-          <a:p>
-            <a:pPr algn="l">
-              <a:spcAft>
-                <a:spcPts val="0"/>
-              </a:spcAft>
-            </a:pPr>
-            <a:r>
-              <a:rPr sz="1150" b="0" i="0">
-                <a:solidFill>
-                  <a:srgbClr val="B4C7D2"/>
-                </a:solidFill>
-                <a:latin typeface="Arial"/>
-              </a:rPr>
-              <a:t>• Ṙ &lt; 0; y = Ṙ²</a:t>
-            </a:r>
-          </a:p>
-        </p:txBody>
-      </p:sp>
-      <p:sp>
-        <p:nvSpPr>
-          <p:cNvPr id="20" name="C3-E09 text 18" descr="sci-ppt:o018"/>
-          <p:cNvSpPr txBox="1"/>
-          <p:nvPr/>
-        </p:nvSpPr>
-        <p:spPr>
-          <a:xfrm>
-            <a:off x="6217920" y="4329684"/>
-            <a:ext cx="5715000" cy="246888"/>
-          </a:xfrm>
-          <a:prstGeom prst="rect">
-            <a:avLst/>
-          </a:prstGeom>
-          <a:noFill/>
-          <a:effectLst/>
-        </p:spPr>
-        <p:txBody>
-          <a:bodyPr wrap="square" lIns="27432" rIns="27432" tIns="18288" bIns="18288" anchor="ctr">
-            <a:spAutoFit/>
-          </a:bodyPr>
-          <a:lstStyle/>
-          <a:p>
-            <a:pPr algn="l">
-              <a:spcAft>
-                <a:spcPts val="0"/>
-              </a:spcAft>
-            </a:pPr>
-            <a:r>
-              <a:rPr sz="1150" b="0" i="0">
-                <a:solidFill>
-                  <a:srgbClr val="B4C7D2"/>
-                </a:solidFill>
-                <a:latin typeface="Arial"/>
-              </a:rPr>
-              <a:t>• S, ρ, Δp_c</a:t>
-            </a:r>
-          </a:p>
-        </p:txBody>
-      </p:sp>
-      <p:sp>
-        <p:nvSpPr>
-          <p:cNvPr id="21" name="C3-E09 text 19" descr="sci-ppt:o019"/>
-          <p:cNvSpPr txBox="1"/>
-          <p:nvPr/>
-        </p:nvSpPr>
-        <p:spPr>
-          <a:xfrm>
-            <a:off x="320040" y="4562856"/>
-            <a:ext cx="5715000" cy="246888"/>
-          </a:xfrm>
-          <a:prstGeom prst="rect">
-            <a:avLst/>
-          </a:prstGeom>
-          <a:noFill/>
-          <a:effectLst/>
-        </p:spPr>
-        <p:txBody>
-          <a:bodyPr wrap="square" lIns="27432" rIns="27432" tIns="18288" bIns="18288" anchor="ctr">
-            <a:spAutoFit/>
-          </a:bodyPr>
-          <a:lstStyle/>
-          <a:p>
-            <a:pPr algn="l">
-              <a:spcAft>
-                <a:spcPts val="0"/>
-              </a:spcAft>
-            </a:pPr>
-            <a:r>
-              <a:rPr sz="1150" b="0" i="0">
-                <a:solidFill>
-                  <a:srgbClr val="B4C7D2"/>
-                </a:solidFill>
-                <a:latin typeface="Arial"/>
-              </a:rPr>
-              <a:t>• Endpoint condition y(R_max) = 0</a:t>
-            </a:r>
-          </a:p>
-        </p:txBody>
-      </p:sp>
-      <p:sp>
-        <p:nvSpPr>
-          <p:cNvPr id="22" name="C3-E09 text 20" descr="sci-ppt:o020"/>
-          <p:cNvSpPr txBox="1"/>
-          <p:nvPr/>
-        </p:nvSpPr>
-        <p:spPr>
-          <a:xfrm>
-            <a:off x="320040" y="5596128"/>
-            <a:ext cx="11430000" cy="292608"/>
-          </a:xfrm>
-          <a:prstGeom prst="rect">
-            <a:avLst/>
-          </a:prstGeom>
-          <a:noFill/>
-          <a:effectLst/>
-        </p:spPr>
-        <p:txBody>
-          <a:bodyPr wrap="square" lIns="27432" rIns="27432" tIns="18288" bIns="18288" anchor="ctr">
+          <a:bodyPr wrap="none" lIns="18288" rIns="18288" tIns="18288" bIns="18288" anchor="t">
             <a:spAutoFit/>
           </a:bodyPr>
           <a:lstStyle/>
@@ -3831,21 +5521,53 @@
                 </a:solidFill>
                 <a:latin typeface="Arial"/>
               </a:rPr>
-              <a:t>At identical relative radius, interaction lowers speed</a:t>
-            </a:r>
-          </a:p>
-        </p:txBody>
-      </p:sp>
-      <p:sp>
-        <p:nvSpPr>
-          <p:cNvPr id="23" name="C3-E09 text 21" descr="sci-ppt:o021"/>
+              <a:t>χ = 0:  |Ṙ| at Rₘₐₓ/2 = 21.6 m/s</a:t>
+            </a:r>
+          </a:p>
+        </p:txBody>
+      </p:sp>
+      <p:sp>
+        <p:nvSpPr>
+          <p:cNvPr id="40" name="C3-E09 rect 38" descr="sci-ppt:o038"/>
+          <p:cNvSpPr/>
+          <p:nvPr/>
+        </p:nvSpPr>
+        <p:spPr>
+          <a:xfrm>
+            <a:off x="3657600" y="1810512"/>
+            <a:ext cx="274320" cy="182880"/>
+          </a:xfrm>
+          <a:prstGeom prst="rect">
+            <a:avLst/>
+          </a:prstGeom>
+          <a:solidFill>
+            <a:srgbClr val="F2B880"/>
+          </a:solidFill>
+          <a:ln w="12700">
+            <a:solidFill>
+              <a:srgbClr val="F2B880"/>
+            </a:solidFill>
+          </a:ln>
+          <a:effectLst/>
+        </p:spPr>
+        <p:txBody>
+          <a:bodyPr rtlCol="0" anchor="ctr"/>
+          <a:lstStyle/>
+          <a:p>
+            <a:pPr algn="ctr"/>
+          </a:p>
+        </p:txBody>
+      </p:sp>
+      <p:sp>
+        <p:nvSpPr>
+          <p:cNvPr id="41" name="C3-E09 text 39" descr="sci-ppt:o039"/>
           <p:cNvSpPr txBox="1"/>
           <p:nvPr/>
         </p:nvSpPr>
         <p:spPr>
           <a:xfrm>
-            <a:off x="320040" y="5870448"/>
-            <a:ext cx="11430000" cy="292608"/>
+            <a:off x="4041648" y="1764792"/>
+            <a:ext cx="2926080" cy="223900"/>
           </a:xfrm>
           <a:prstGeom prst="rect">
             <a:avLst/>
@@ -3854,7 +5576,7 @@
           <a:effectLst/>
         </p:spPr>
         <p:txBody>
-          <a:bodyPr wrap="square" lIns="27432" rIns="27432" tIns="18288" bIns="18288" anchor="ctr">
+          <a:bodyPr wrap="none" lIns="18288" rIns="18288" tIns="18288" bIns="18288" anchor="t">
             <a:spAutoFit/>
           </a:bodyPr>
           <a:lstStyle/>
@@ -3867,25 +5589,57 @@
             <a:r>
               <a:rPr sz="1150" b="0" i="0">
                 <a:solidFill>
-                  <a:srgbClr val="8EDBD4"/>
+                  <a:srgbClr val="F2B880"/>
                 </a:solidFill>
                 <a:latin typeface="Arial"/>
               </a:rPr>
-              <a:t>The zero-radius endpoint remains formal</a:t>
-            </a:r>
-          </a:p>
-        </p:txBody>
-      </p:sp>
-      <p:sp>
-        <p:nvSpPr>
-          <p:cNvPr id="24" name="C3-E09 text 22" descr="sci-ppt:o022"/>
+              <a:t>χ = 1:  |Ṙ| at Rₘₐₓ/2 = 17.6 m/s</a:t>
+            </a:r>
+          </a:p>
+        </p:txBody>
+      </p:sp>
+      <p:sp>
+        <p:nvSpPr>
+          <p:cNvPr id="42" name="C3-E09 rect 40" descr="sci-ppt:o040"/>
+          <p:cNvSpPr/>
+          <p:nvPr/>
+        </p:nvSpPr>
+        <p:spPr>
+          <a:xfrm>
+            <a:off x="3657600" y="2139696"/>
+            <a:ext cx="274320" cy="182880"/>
+          </a:xfrm>
+          <a:prstGeom prst="rect">
+            <a:avLst/>
+          </a:prstGeom>
+          <a:solidFill>
+            <a:srgbClr val="F28BA0"/>
+          </a:solidFill>
+          <a:ln w="12700">
+            <a:solidFill>
+              <a:srgbClr val="F28BA0"/>
+            </a:solidFill>
+          </a:ln>
+          <a:effectLst/>
+        </p:spPr>
+        <p:txBody>
+          <a:bodyPr rtlCol="0" anchor="ctr"/>
+          <a:lstStyle/>
+          <a:p>
+            <a:pPr algn="ctr"/>
+          </a:p>
+        </p:txBody>
+      </p:sp>
+      <p:sp>
+        <p:nvSpPr>
+          <p:cNvPr id="43" name="C3-E09 text 41" descr="sci-ppt:o041"/>
           <p:cNvSpPr txBox="1"/>
           <p:nvPr/>
         </p:nvSpPr>
         <p:spPr>
           <a:xfrm>
-            <a:off x="320040" y="6473952"/>
-            <a:ext cx="11430000" cy="256032"/>
+            <a:off x="4041648" y="2093976"/>
+            <a:ext cx="2926080" cy="223900"/>
           </a:xfrm>
           <a:prstGeom prst="rect">
             <a:avLst/>
@@ -3894,7 +5648,519 @@
           <a:effectLst/>
         </p:spPr>
         <p:txBody>
-          <a:bodyPr wrap="square" lIns="27432" rIns="27432" tIns="18288" bIns="18288" anchor="ctr">
+          <a:bodyPr wrap="none" lIns="18288" rIns="18288" tIns="18288" bIns="18288" anchor="t">
+            <a:spAutoFit/>
+          </a:bodyPr>
+          <a:lstStyle/>
+          <a:p>
+            <a:pPr algn="l">
+              <a:spcAft>
+                <a:spcPts val="0"/>
+              </a:spcAft>
+            </a:pPr>
+            <a:r>
+              <a:rPr sz="1150" b="0" i="0">
+                <a:solidFill>
+                  <a:srgbClr val="F28BA0"/>
+                </a:solidFill>
+                <a:latin typeface="Arial"/>
+              </a:rPr>
+              <a:t>χ = 3:  |Ṙ| at Rₘₐₓ/2 = 13.7 m/s</a:t>
+            </a:r>
+          </a:p>
+        </p:txBody>
+      </p:sp>
+      <p:sp>
+        <p:nvSpPr>
+          <p:cNvPr id="44" name="C3-E09 round_rect 42" descr="sci-ppt:o042"/>
+          <p:cNvSpPr/>
+          <p:nvPr/>
+        </p:nvSpPr>
+        <p:spPr>
+          <a:xfrm>
+            <a:off x="7223760" y="1371600"/>
+            <a:ext cx="4617720" cy="3657600"/>
+          </a:xfrm>
+          <a:prstGeom prst="roundRect">
+            <a:avLst/>
+          </a:prstGeom>
+          <a:solidFill>
+            <a:srgbClr val="213E4B"/>
+          </a:solidFill>
+          <a:ln w="20320">
+            <a:solidFill>
+              <a:srgbClr val="8EDBD4"/>
+            </a:solidFill>
+          </a:ln>
+          <a:effectLst/>
+        </p:spPr>
+        <p:txBody>
+          <a:bodyPr rtlCol="0" anchor="ctr"/>
+          <a:lstStyle/>
+          <a:p>
+            <a:pPr algn="ctr"/>
+          </a:p>
+        </p:txBody>
+      </p:sp>
+      <p:sp>
+        <p:nvSpPr>
+          <p:cNvPr id="45" name="C3-E09 text 43" descr="sci-ppt:o043"/>
+          <p:cNvSpPr txBox="1"/>
+          <p:nvPr/>
+        </p:nvSpPr>
+        <p:spPr>
+          <a:xfrm>
+            <a:off x="7333488" y="1426464"/>
+            <a:ext cx="4398264" cy="254889"/>
+          </a:xfrm>
+          <a:prstGeom prst="rect">
+            <a:avLst/>
+          </a:prstGeom>
+          <a:noFill/>
+          <a:effectLst/>
+        </p:spPr>
+        <p:txBody>
+          <a:bodyPr wrap="none" lIns="18288" rIns="18288" tIns="18288" bIns="18288" anchor="t">
+            <a:spAutoFit/>
+          </a:bodyPr>
+          <a:lstStyle/>
+          <a:p>
+            <a:pPr algn="l">
+              <a:spcAft>
+                <a:spcPts val="0"/>
+              </a:spcAft>
+            </a:pPr>
+            <a:r>
+              <a:rPr sz="1350" b="1" i="0">
+                <a:solidFill>
+                  <a:srgbClr val="8EDBD4"/>
+                </a:solidFill>
+                <a:latin typeface="Arial"/>
+              </a:rPr>
+              <a:t>Integrated solution</a:t>
+            </a:r>
+          </a:p>
+        </p:txBody>
+      </p:sp>
+      <p:sp>
+        <p:nvSpPr>
+          <p:cNvPr id="46" name="C3-E09 text 44" descr="sci-ppt:o044"/>
+          <p:cNvSpPr txBox="1"/>
+          <p:nvPr/>
+        </p:nvSpPr>
+        <p:spPr>
+          <a:xfrm>
+            <a:off x="7360920" y="1828800"/>
+            <a:ext cx="4389120" cy="231648"/>
+          </a:xfrm>
+          <a:prstGeom prst="rect">
+            <a:avLst/>
+          </a:prstGeom>
+          <a:noFill/>
+          <a:effectLst/>
+        </p:spPr>
+        <p:txBody>
+          <a:bodyPr wrap="none" lIns="18288" rIns="18288" tIns="18288" bIns="18288" anchor="t">
+            <a:spAutoFit/>
+          </a:bodyPr>
+          <a:lstStyle/>
+          <a:p>
+            <a:pPr algn="l">
+              <a:spcAft>
+                <a:spcPts val="0"/>
+              </a:spcAft>
+            </a:pPr>
+            <a:r>
+              <a:rPr sz="1200" b="1" i="0">
+                <a:solidFill>
+                  <a:srgbClr val="E7F0F3"/>
+                </a:solidFill>
+                <a:latin typeface="Arial"/>
+              </a:rPr>
+              <a:t>Ṙ = −√{ (2Δp_c/3ρ) (Rₘₐₓ³ − R³) / [R³ (1 + SR)] }</a:t>
+            </a:r>
+          </a:p>
+        </p:txBody>
+      </p:sp>
+      <p:sp>
+        <p:nvSpPr>
+          <p:cNvPr id="47" name="C3-E09 text 45" descr="sci-ppt:o045"/>
+          <p:cNvSpPr txBox="1"/>
+          <p:nvPr/>
+        </p:nvSpPr>
+        <p:spPr>
+          <a:xfrm>
+            <a:off x="7562088" y="2560320"/>
+            <a:ext cx="4187952" cy="417576"/>
+          </a:xfrm>
+          <a:prstGeom prst="rect">
+            <a:avLst/>
+          </a:prstGeom>
+          <a:noFill/>
+          <a:effectLst/>
+        </p:spPr>
+        <p:txBody>
+          <a:bodyPr wrap="none" lIns="18288" rIns="18288" tIns="18288" bIns="18288" anchor="t">
+            <a:spAutoFit/>
+          </a:bodyPr>
+          <a:lstStyle/>
+          <a:p>
+            <a:pPr algn="l">
+              <a:spcAft>
+                <a:spcPts val="0"/>
+              </a:spcAft>
+            </a:pPr>
+            <a:r>
+              <a:rPr sz="1200" b="0" i="0">
+                <a:solidFill>
+                  <a:srgbClr val="E7F0F3"/>
+                </a:solidFill>
+                <a:latin typeface="Arial"/>
+              </a:rPr>
+              <a:t>[R³(1 + SR) y] from Rₘₐₓ to R integrates to</a:t>
+            </a:r>
+          </a:p>
+          <a:p>
+            <a:pPr algn="l">
+              <a:spcAft>
+                <a:spcPts val="0"/>
+              </a:spcAft>
+            </a:pPr>
+            <a:r>
+              <a:rPr sz="1200" b="0" i="0">
+                <a:solidFill>
+                  <a:srgbClr val="E7F0F3"/>
+                </a:solidFill>
+                <a:latin typeface="Arial"/>
+              </a:rPr>
+              <a:t>(2Δp_c/3ρ)(Rₘₐₓ³ − R³).</a:t>
+            </a:r>
+          </a:p>
+        </p:txBody>
+      </p:sp>
+      <p:sp>
+        <p:nvSpPr>
+          <p:cNvPr id="48" name="C3-E09 ellipse 46" descr="sci-ppt:o046"/>
+          <p:cNvSpPr/>
+          <p:nvPr/>
+        </p:nvSpPr>
+        <p:spPr>
+          <a:xfrm>
+            <a:off x="7392924" y="2613660"/>
+            <a:ext cx="82296" cy="82296"/>
+          </a:xfrm>
+          <a:prstGeom prst="ellipse">
+            <a:avLst/>
+          </a:prstGeom>
+          <a:solidFill>
+            <a:srgbClr val="8EDBD4"/>
+          </a:solidFill>
+          <a:ln w="12700">
+            <a:solidFill>
+              <a:srgbClr val="8EDBD4"/>
+            </a:solidFill>
+          </a:ln>
+          <a:effectLst/>
+        </p:spPr>
+        <p:txBody>
+          <a:bodyPr rtlCol="0" anchor="ctr"/>
+          <a:lstStyle/>
+          <a:p>
+            <a:pPr algn="ctr"/>
+          </a:p>
+        </p:txBody>
+      </p:sp>
+      <p:sp>
+        <p:nvSpPr>
+          <p:cNvPr id="49" name="C3-E09 text 47" descr="sci-ppt:o047"/>
+          <p:cNvSpPr txBox="1"/>
+          <p:nvPr/>
+        </p:nvSpPr>
+        <p:spPr>
+          <a:xfrm>
+            <a:off x="7562088" y="3023615"/>
+            <a:ext cx="4187952" cy="231648"/>
+          </a:xfrm>
+          <a:prstGeom prst="rect">
+            <a:avLst/>
+          </a:prstGeom>
+          <a:noFill/>
+          <a:effectLst/>
+        </p:spPr>
+        <p:txBody>
+          <a:bodyPr wrap="none" lIns="18288" rIns="18288" tIns="18288" bIns="18288" anchor="t">
+            <a:spAutoFit/>
+          </a:bodyPr>
+          <a:lstStyle/>
+          <a:p>
+            <a:pPr algn="l">
+              <a:spcAft>
+                <a:spcPts val="0"/>
+              </a:spcAft>
+            </a:pPr>
+            <a:r>
+              <a:rPr sz="1200" b="0" i="0">
+                <a:solidFill>
+                  <a:srgbClr val="E7F0F3"/>
+                </a:solidFill>
+                <a:latin typeface="Arial"/>
+              </a:rPr>
+              <a:t>The condition y(Rₘₐₓ) = 0 removes the constant.</a:t>
+            </a:r>
+          </a:p>
+        </p:txBody>
+      </p:sp>
+      <p:sp>
+        <p:nvSpPr>
+          <p:cNvPr id="50" name="C3-E09 ellipse 48" descr="sci-ppt:o048"/>
+          <p:cNvSpPr/>
+          <p:nvPr/>
+        </p:nvSpPr>
+        <p:spPr>
+          <a:xfrm>
+            <a:off x="7392924" y="3076956"/>
+            <a:ext cx="82296" cy="82296"/>
+          </a:xfrm>
+          <a:prstGeom prst="ellipse">
+            <a:avLst/>
+          </a:prstGeom>
+          <a:solidFill>
+            <a:srgbClr val="8EDBD4"/>
+          </a:solidFill>
+          <a:ln w="12700">
+            <a:solidFill>
+              <a:srgbClr val="8EDBD4"/>
+            </a:solidFill>
+          </a:ln>
+          <a:effectLst/>
+        </p:spPr>
+        <p:txBody>
+          <a:bodyPr rtlCol="0" anchor="ctr"/>
+          <a:lstStyle/>
+          <a:p>
+            <a:pPr algn="ctr"/>
+          </a:p>
+        </p:txBody>
+      </p:sp>
+      <p:sp>
+        <p:nvSpPr>
+          <p:cNvPr id="51" name="C3-E09 text 49" descr="sci-ppt:o049"/>
+          <p:cNvSpPr txBox="1"/>
+          <p:nvPr/>
+        </p:nvSpPr>
+        <p:spPr>
+          <a:xfrm>
+            <a:off x="7562088" y="3300983"/>
+            <a:ext cx="4187952" cy="231648"/>
+          </a:xfrm>
+          <a:prstGeom prst="rect">
+            <a:avLst/>
+          </a:prstGeom>
+          <a:noFill/>
+          <a:effectLst/>
+        </p:spPr>
+        <p:txBody>
+          <a:bodyPr wrap="none" lIns="18288" rIns="18288" tIns="18288" bIns="18288" anchor="t">
+            <a:spAutoFit/>
+          </a:bodyPr>
+          <a:lstStyle/>
+          <a:p>
+            <a:pPr algn="l">
+              <a:spcAft>
+                <a:spcPts val="0"/>
+              </a:spcAft>
+            </a:pPr>
+            <a:r>
+              <a:rPr sz="1200" b="0" i="0">
+                <a:solidFill>
+                  <a:srgbClr val="E7F0F3"/>
+                </a:solidFill>
+                <a:latin typeface="Arial"/>
+              </a:rPr>
+              <a:t>The minus sign selects the inward branch.</a:t>
+            </a:r>
+          </a:p>
+        </p:txBody>
+      </p:sp>
+      <p:sp>
+        <p:nvSpPr>
+          <p:cNvPr id="52" name="C3-E09 ellipse 50" descr="sci-ppt:o050"/>
+          <p:cNvSpPr/>
+          <p:nvPr/>
+        </p:nvSpPr>
+        <p:spPr>
+          <a:xfrm>
+            <a:off x="7392924" y="3354323"/>
+            <a:ext cx="82296" cy="82296"/>
+          </a:xfrm>
+          <a:prstGeom prst="ellipse">
+            <a:avLst/>
+          </a:prstGeom>
+          <a:solidFill>
+            <a:srgbClr val="8EDBD4"/>
+          </a:solidFill>
+          <a:ln w="12700">
+            <a:solidFill>
+              <a:srgbClr val="8EDBD4"/>
+            </a:solidFill>
+          </a:ln>
+          <a:effectLst/>
+        </p:spPr>
+        <p:txBody>
+          <a:bodyPr rtlCol="0" anchor="ctr"/>
+          <a:lstStyle/>
+          <a:p>
+            <a:pPr algn="ctr"/>
+          </a:p>
+        </p:txBody>
+      </p:sp>
+      <p:sp>
+        <p:nvSpPr>
+          <p:cNvPr id="53" name="C3-E09 text 51" descr="sci-ppt:o051"/>
+          <p:cNvSpPr txBox="1"/>
+          <p:nvPr/>
+        </p:nvSpPr>
+        <p:spPr>
+          <a:xfrm>
+            <a:off x="7562088" y="3578351"/>
+            <a:ext cx="4187952" cy="417576"/>
+          </a:xfrm>
+          <a:prstGeom prst="rect">
+            <a:avLst/>
+          </a:prstGeom>
+          <a:noFill/>
+          <a:effectLst/>
+        </p:spPr>
+        <p:txBody>
+          <a:bodyPr wrap="none" lIns="18288" rIns="18288" tIns="18288" bIns="18288" anchor="t">
+            <a:spAutoFit/>
+          </a:bodyPr>
+          <a:lstStyle/>
+          <a:p>
+            <a:pPr algn="l">
+              <a:spcAft>
+                <a:spcPts val="0"/>
+              </a:spcAft>
+            </a:pPr>
+            <a:r>
+              <a:rPr sz="1200" b="0" i="0">
+                <a:solidFill>
+                  <a:srgbClr val="E7F0F3"/>
+                </a:solidFill>
+                <a:latin typeface="Arial"/>
+              </a:rPr>
+              <a:t>Interaction (χ &gt; 0) lowers the speed at every</a:t>
+            </a:r>
+          </a:p>
+          <a:p>
+            <a:pPr algn="l">
+              <a:spcAft>
+                <a:spcPts val="0"/>
+              </a:spcAft>
+            </a:pPr>
+            <a:r>
+              <a:rPr sz="1200" b="0" i="0">
+                <a:solidFill>
+                  <a:srgbClr val="E7F0F3"/>
+                </a:solidFill>
+                <a:latin typeface="Arial"/>
+              </a:rPr>
+              <a:t>radius.</a:t>
+            </a:r>
+          </a:p>
+        </p:txBody>
+      </p:sp>
+      <p:sp>
+        <p:nvSpPr>
+          <p:cNvPr id="54" name="C3-E09 ellipse 52" descr="sci-ppt:o052"/>
+          <p:cNvSpPr/>
+          <p:nvPr/>
+        </p:nvSpPr>
+        <p:spPr>
+          <a:xfrm>
+            <a:off x="7392924" y="3631691"/>
+            <a:ext cx="82296" cy="82296"/>
+          </a:xfrm>
+          <a:prstGeom prst="ellipse">
+            <a:avLst/>
+          </a:prstGeom>
+          <a:solidFill>
+            <a:srgbClr val="8EDBD4"/>
+          </a:solidFill>
+          <a:ln w="12700">
+            <a:solidFill>
+              <a:srgbClr val="8EDBD4"/>
+            </a:solidFill>
+          </a:ln>
+          <a:effectLst/>
+        </p:spPr>
+        <p:txBody>
+          <a:bodyPr rtlCol="0" anchor="ctr"/>
+          <a:lstStyle/>
+          <a:p>
+            <a:pPr algn="ctr"/>
+          </a:p>
+        </p:txBody>
+      </p:sp>
+      <p:sp>
+        <p:nvSpPr>
+          <p:cNvPr id="55" name="C3-E09 text 53" descr="sci-ppt:o053"/>
+          <p:cNvSpPr txBox="1"/>
+          <p:nvPr/>
+        </p:nvSpPr>
+        <p:spPr>
+          <a:xfrm>
+            <a:off x="914400" y="5733288"/>
+            <a:ext cx="10972800" cy="239395"/>
+          </a:xfrm>
+          <a:prstGeom prst="rect">
+            <a:avLst/>
+          </a:prstGeom>
+          <a:noFill/>
+          <a:effectLst/>
+        </p:spPr>
+        <p:txBody>
+          <a:bodyPr wrap="none" lIns="18288" rIns="18288" tIns="18288" bIns="18288" anchor="t">
+            <a:spAutoFit/>
+          </a:bodyPr>
+          <a:lstStyle/>
+          <a:p>
+            <a:pPr algn="l">
+              <a:spcAft>
+                <a:spcPts val="0"/>
+              </a:spcAft>
+            </a:pPr>
+            <a:r>
+              <a:rPr sz="1250" b="0" i="0">
+                <a:solidFill>
+                  <a:srgbClr val="E7F0F3"/>
+                </a:solidFill>
+                <a:latin typeface="Arial"/>
+              </a:rPr>
+              <a:t>Speed at half radius: 21.6 m/s for an isolated bubble, lower when neighbours add inertia.</a:t>
+            </a:r>
+          </a:p>
+        </p:txBody>
+      </p:sp>
+      <p:sp>
+        <p:nvSpPr>
+          <p:cNvPr id="56" name="C3-E09 text 54" descr="sci-ppt:o054"/>
+          <p:cNvSpPr txBox="1"/>
+          <p:nvPr/>
+        </p:nvSpPr>
+        <p:spPr>
+          <a:xfrm>
+            <a:off x="320040" y="6510528"/>
+            <a:ext cx="11521440" cy="200660"/>
+          </a:xfrm>
+          <a:prstGeom prst="rect">
+            <a:avLst/>
+          </a:prstGeom>
+          <a:noFill/>
+          <a:effectLst/>
+        </p:spPr>
+        <p:txBody>
+          <a:bodyPr wrap="none" lIns="18288" rIns="18288" tIns="18288" bIns="18288" anchor="t">
             <a:spAutoFit/>
           </a:bodyPr>
           <a:lstStyle/>
@@ -3911,7 +6177,7 @@
                 </a:solidFill>
                 <a:latin typeface="Arial"/>
               </a:rPr>
-              <a:t>Model schematic; geometry is not to scale.</a:t>
+              <a:t>Integrated speed of Eq. C3-E09 (Rₘₐₓ = 30 µm, ρ = 1000 kg/m³, Δp_c = 100 kPa).</a:t>
             </a:r>
           </a:p>
         </p:txBody>
